--- a/deep_learning/2_CNN/CNN-1-Application.pptx
+++ b/deep_learning/2_CNN/CNN-1-Application.pptx
@@ -4,12 +4,20 @@
   <p:sldMasterIdLst>
     <p:sldMasterId id="2147483648" r:id="rId1"/>
   </p:sldMasterIdLst>
+  <p:notesMasterIdLst>
+    <p:notesMasterId r:id="rId9"/>
+  </p:notesMasterIdLst>
+  <p:handoutMasterIdLst>
+    <p:handoutMasterId r:id="rId10"/>
+  </p:handoutMasterIdLst>
   <p:sldIdLst>
-    <p:sldId id="256" r:id="rId2"/>
-    <p:sldId id="257" r:id="rId3"/>
-    <p:sldId id="258" r:id="rId4"/>
-    <p:sldId id="260" r:id="rId5"/>
-    <p:sldId id="262" r:id="rId6"/>
+    <p:sldId id="257" r:id="rId2"/>
+    <p:sldId id="258" r:id="rId3"/>
+    <p:sldId id="260" r:id="rId4"/>
+    <p:sldId id="262" r:id="rId5"/>
+    <p:sldId id="364" r:id="rId6"/>
+    <p:sldId id="363" r:id="rId7"/>
+    <p:sldId id="275" r:id="rId8"/>
   </p:sldIdLst>
   <p:sldSz cx="12192000" cy="6858000"/>
   <p:notesSz cx="6858000" cy="9144000"/>
@@ -108,7 +116,553 @@
       </a:defRPr>
     </a:lvl9pPr>
   </p:defaultTextStyle>
+  <p:extLst>
+    <p:ext uri="{EFAFB233-063F-42B5-8137-9DF3F51BA10A}">
+      <p15:sldGuideLst xmlns:p15="http://schemas.microsoft.com/office/powerpoint/2012/main"/>
+    </p:ext>
+    <p:ext uri="{2D200454-40CA-4A62-9FC3-DE9A4176ACB9}">
+      <p15:notesGuideLst xmlns:p15="http://schemas.microsoft.com/office/powerpoint/2012/main"/>
+    </p:ext>
+  </p:extLst>
 </p:presentation>
+</file>
+
+<file path=ppt/handoutMasters/handoutMaster1.xml><?xml version="1.0" encoding="utf-8"?>
+<p:handoutMaster xmlns:a="http://schemas.openxmlformats.org/drawingml/2006/main" xmlns:r="http://schemas.openxmlformats.org/officeDocument/2006/relationships" xmlns:p="http://schemas.openxmlformats.org/presentationml/2006/main">
+  <p:cSld>
+    <p:bg>
+      <p:bgRef idx="1001">
+        <a:schemeClr val="bg1"/>
+      </p:bgRef>
+    </p:bg>
+    <p:spTree>
+      <p:nvGrpSpPr>
+        <p:cNvPr id="1" name=""/>
+        <p:cNvGrpSpPr/>
+        <p:nvPr/>
+      </p:nvGrpSpPr>
+      <p:grpSpPr>
+        <a:xfrm>
+          <a:off x="0" y="0"/>
+          <a:ext cx="0" cy="0"/>
+          <a:chOff x="0" y="0"/>
+          <a:chExt cx="0" cy="0"/>
+        </a:xfrm>
+      </p:grpSpPr>
+      <p:sp>
+        <p:nvSpPr>
+          <p:cNvPr id="2" name="Header Placeholder 1">
+            <a:extLst>
+              <a:ext uri="{FF2B5EF4-FFF2-40B4-BE49-F238E27FC236}">
+                <a16:creationId xmlns:a16="http://schemas.microsoft.com/office/drawing/2014/main" id="{1ACA3A45-07AA-881E-EBAC-FAE1FFF9B3BB}"/>
+              </a:ext>
+            </a:extLst>
+          </p:cNvPr>
+          <p:cNvSpPr>
+            <a:spLocks noGrp="1"/>
+          </p:cNvSpPr>
+          <p:nvPr>
+            <p:ph type="hdr" sz="quarter"/>
+          </p:nvPr>
+        </p:nvSpPr>
+        <p:spPr>
+          <a:xfrm>
+            <a:off x="0" y="0"/>
+            <a:ext cx="2971800" cy="458788"/>
+          </a:xfrm>
+          <a:prstGeom prst="rect">
+            <a:avLst/>
+          </a:prstGeom>
+        </p:spPr>
+        <p:txBody>
+          <a:bodyPr vert="horz" lIns="91440" tIns="45720" rIns="91440" bIns="45720" rtlCol="0"/>
+          <a:lstStyle>
+            <a:lvl1pPr algn="l">
+              <a:defRPr sz="1200"/>
+            </a:lvl1pPr>
+          </a:lstStyle>
+          <a:p>
+            <a:endParaRPr lang="en-US"/>
+          </a:p>
+        </p:txBody>
+      </p:sp>
+      <p:sp>
+        <p:nvSpPr>
+          <p:cNvPr id="3" name="Date Placeholder 2">
+            <a:extLst>
+              <a:ext uri="{FF2B5EF4-FFF2-40B4-BE49-F238E27FC236}">
+                <a16:creationId xmlns:a16="http://schemas.microsoft.com/office/drawing/2014/main" id="{B72C2385-62BD-1B9C-A617-554DDB21E0F4}"/>
+              </a:ext>
+            </a:extLst>
+          </p:cNvPr>
+          <p:cNvSpPr>
+            <a:spLocks noGrp="1"/>
+          </p:cNvSpPr>
+          <p:nvPr>
+            <p:ph type="dt" sz="quarter" idx="1"/>
+          </p:nvPr>
+        </p:nvSpPr>
+        <p:spPr>
+          <a:xfrm>
+            <a:off x="3884613" y="0"/>
+            <a:ext cx="2971800" cy="458788"/>
+          </a:xfrm>
+          <a:prstGeom prst="rect">
+            <a:avLst/>
+          </a:prstGeom>
+        </p:spPr>
+        <p:txBody>
+          <a:bodyPr vert="horz" lIns="91440" tIns="45720" rIns="91440" bIns="45720" rtlCol="0"/>
+          <a:lstStyle>
+            <a:lvl1pPr algn="r">
+              <a:defRPr sz="1200"/>
+            </a:lvl1pPr>
+          </a:lstStyle>
+          <a:p>
+            <a:fld id="{7BAEECA8-D063-486F-AE31-5020270C1449}" type="datetimeFigureOut">
+              <a:rPr lang="en-US" smtClean="0"/>
+              <a:t>4/12/2026</a:t>
+            </a:fld>
+            <a:endParaRPr lang="en-US"/>
+          </a:p>
+        </p:txBody>
+      </p:sp>
+      <p:sp>
+        <p:nvSpPr>
+          <p:cNvPr id="4" name="Footer Placeholder 3">
+            <a:extLst>
+              <a:ext uri="{FF2B5EF4-FFF2-40B4-BE49-F238E27FC236}">
+                <a16:creationId xmlns:a16="http://schemas.microsoft.com/office/drawing/2014/main" id="{C5328A6F-7933-1F9C-E9F6-B4A61026FBA4}"/>
+              </a:ext>
+            </a:extLst>
+          </p:cNvPr>
+          <p:cNvSpPr>
+            <a:spLocks noGrp="1"/>
+          </p:cNvSpPr>
+          <p:nvPr>
+            <p:ph type="ftr" sz="quarter" idx="2"/>
+          </p:nvPr>
+        </p:nvSpPr>
+        <p:spPr>
+          <a:xfrm>
+            <a:off x="0" y="8685213"/>
+            <a:ext cx="2971800" cy="458787"/>
+          </a:xfrm>
+          <a:prstGeom prst="rect">
+            <a:avLst/>
+          </a:prstGeom>
+        </p:spPr>
+        <p:txBody>
+          <a:bodyPr vert="horz" lIns="91440" tIns="45720" rIns="91440" bIns="45720" rtlCol="0" anchor="b"/>
+          <a:lstStyle>
+            <a:lvl1pPr algn="l">
+              <a:defRPr sz="1200"/>
+            </a:lvl1pPr>
+          </a:lstStyle>
+          <a:p>
+            <a:endParaRPr lang="en-US"/>
+          </a:p>
+        </p:txBody>
+      </p:sp>
+      <p:sp>
+        <p:nvSpPr>
+          <p:cNvPr id="5" name="Slide Number Placeholder 4">
+            <a:extLst>
+              <a:ext uri="{FF2B5EF4-FFF2-40B4-BE49-F238E27FC236}">
+                <a16:creationId xmlns:a16="http://schemas.microsoft.com/office/drawing/2014/main" id="{66F9A57F-3A38-6EDA-B76D-A3DB4F6978A7}"/>
+              </a:ext>
+            </a:extLst>
+          </p:cNvPr>
+          <p:cNvSpPr>
+            <a:spLocks noGrp="1"/>
+          </p:cNvSpPr>
+          <p:nvPr>
+            <p:ph type="sldNum" sz="quarter" idx="3"/>
+          </p:nvPr>
+        </p:nvSpPr>
+        <p:spPr>
+          <a:xfrm>
+            <a:off x="3884613" y="8685213"/>
+            <a:ext cx="2971800" cy="458787"/>
+          </a:xfrm>
+          <a:prstGeom prst="rect">
+            <a:avLst/>
+          </a:prstGeom>
+        </p:spPr>
+        <p:txBody>
+          <a:bodyPr vert="horz" lIns="91440" tIns="45720" rIns="91440" bIns="45720" rtlCol="0" anchor="b"/>
+          <a:lstStyle>
+            <a:lvl1pPr algn="r">
+              <a:defRPr sz="1200"/>
+            </a:lvl1pPr>
+          </a:lstStyle>
+          <a:p>
+            <a:fld id="{5793F6CE-D1D9-4B7B-9040-C7CAC074A6CE}" type="slidenum">
+              <a:rPr lang="en-US" smtClean="0"/>
+              <a:t>‹#›</a:t>
+            </a:fld>
+            <a:endParaRPr lang="en-US"/>
+          </a:p>
+        </p:txBody>
+      </p:sp>
+    </p:spTree>
+    <p:extLst>
+      <p:ext uri="{BB962C8B-B14F-4D97-AF65-F5344CB8AC3E}">
+        <p14:creationId xmlns:p14="http://schemas.microsoft.com/office/powerpoint/2010/main" val="397613359"/>
+      </p:ext>
+    </p:extLst>
+  </p:cSld>
+  <p:clrMap bg1="lt1" tx1="dk1" bg2="lt2" tx2="dk2" accent1="accent1" accent2="accent2" accent3="accent3" accent4="accent4" accent5="accent5" accent6="accent6" hlink="hlink" folHlink="folHlink"/>
+</p:handoutMaster>
+</file>
+
+<file path=ppt/notesMasters/notesMaster1.xml><?xml version="1.0" encoding="utf-8"?>
+<p:notesMaster xmlns:a="http://schemas.openxmlformats.org/drawingml/2006/main" xmlns:r="http://schemas.openxmlformats.org/officeDocument/2006/relationships" xmlns:p="http://schemas.openxmlformats.org/presentationml/2006/main">
+  <p:cSld>
+    <p:bg>
+      <p:bgRef idx="1001">
+        <a:schemeClr val="bg1"/>
+      </p:bgRef>
+    </p:bg>
+    <p:spTree>
+      <p:nvGrpSpPr>
+        <p:cNvPr id="1" name=""/>
+        <p:cNvGrpSpPr/>
+        <p:nvPr/>
+      </p:nvGrpSpPr>
+      <p:grpSpPr>
+        <a:xfrm>
+          <a:off x="0" y="0"/>
+          <a:ext cx="0" cy="0"/>
+          <a:chOff x="0" y="0"/>
+          <a:chExt cx="0" cy="0"/>
+        </a:xfrm>
+      </p:grpSpPr>
+      <p:sp>
+        <p:nvSpPr>
+          <p:cNvPr id="2" name="Header Placeholder 1"/>
+          <p:cNvSpPr>
+            <a:spLocks noGrp="1"/>
+          </p:cNvSpPr>
+          <p:nvPr>
+            <p:ph type="hdr" sz="quarter"/>
+          </p:nvPr>
+        </p:nvSpPr>
+        <p:spPr>
+          <a:xfrm>
+            <a:off x="0" y="0"/>
+            <a:ext cx="2971800" cy="458788"/>
+          </a:xfrm>
+          <a:prstGeom prst="rect">
+            <a:avLst/>
+          </a:prstGeom>
+        </p:spPr>
+        <p:txBody>
+          <a:bodyPr vert="horz" lIns="91440" tIns="45720" rIns="91440" bIns="45720" rtlCol="0"/>
+          <a:lstStyle>
+            <a:lvl1pPr algn="l">
+              <a:defRPr sz="1200"/>
+            </a:lvl1pPr>
+          </a:lstStyle>
+          <a:p>
+            <a:endParaRPr lang="en-US"/>
+          </a:p>
+        </p:txBody>
+      </p:sp>
+      <p:sp>
+        <p:nvSpPr>
+          <p:cNvPr id="3" name="Date Placeholder 2"/>
+          <p:cNvSpPr>
+            <a:spLocks noGrp="1"/>
+          </p:cNvSpPr>
+          <p:nvPr>
+            <p:ph type="dt" idx="1"/>
+          </p:nvPr>
+        </p:nvSpPr>
+        <p:spPr>
+          <a:xfrm>
+            <a:off x="3884613" y="0"/>
+            <a:ext cx="2971800" cy="458788"/>
+          </a:xfrm>
+          <a:prstGeom prst="rect">
+            <a:avLst/>
+          </a:prstGeom>
+        </p:spPr>
+        <p:txBody>
+          <a:bodyPr vert="horz" lIns="91440" tIns="45720" rIns="91440" bIns="45720" rtlCol="0"/>
+          <a:lstStyle>
+            <a:lvl1pPr algn="r">
+              <a:defRPr sz="1200"/>
+            </a:lvl1pPr>
+          </a:lstStyle>
+          <a:p>
+            <a:fld id="{CB233BD1-3BA8-448D-9D08-7846095EA517}" type="datetimeFigureOut">
+              <a:rPr lang="en-US" smtClean="0"/>
+              <a:t>4/12/2026</a:t>
+            </a:fld>
+            <a:endParaRPr lang="en-US"/>
+          </a:p>
+        </p:txBody>
+      </p:sp>
+      <p:sp>
+        <p:nvSpPr>
+          <p:cNvPr id="4" name="Slide Image Placeholder 3"/>
+          <p:cNvSpPr>
+            <a:spLocks noGrp="1" noRot="1" noChangeAspect="1"/>
+          </p:cNvSpPr>
+          <p:nvPr>
+            <p:ph type="sldImg" idx="2"/>
+          </p:nvPr>
+        </p:nvSpPr>
+        <p:spPr>
+          <a:xfrm>
+            <a:off x="685800" y="1143000"/>
+            <a:ext cx="5486400" cy="3086100"/>
+          </a:xfrm>
+          <a:prstGeom prst="rect">
+            <a:avLst/>
+          </a:prstGeom>
+          <a:noFill/>
+          <a:ln w="12700">
+            <a:solidFill>
+              <a:prstClr val="black"/>
+            </a:solidFill>
+          </a:ln>
+        </p:spPr>
+        <p:txBody>
+          <a:bodyPr vert="horz" lIns="91440" tIns="45720" rIns="91440" bIns="45720" rtlCol="0" anchor="ctr"/>
+          <a:lstStyle/>
+          <a:p>
+            <a:endParaRPr lang="en-US"/>
+          </a:p>
+        </p:txBody>
+      </p:sp>
+      <p:sp>
+        <p:nvSpPr>
+          <p:cNvPr id="5" name="Notes Placeholder 4"/>
+          <p:cNvSpPr>
+            <a:spLocks noGrp="1"/>
+          </p:cNvSpPr>
+          <p:nvPr>
+            <p:ph type="body" sz="quarter" idx="3"/>
+          </p:nvPr>
+        </p:nvSpPr>
+        <p:spPr>
+          <a:xfrm>
+            <a:off x="685800" y="4400550"/>
+            <a:ext cx="5486400" cy="3600450"/>
+          </a:xfrm>
+          <a:prstGeom prst="rect">
+            <a:avLst/>
+          </a:prstGeom>
+        </p:spPr>
+        <p:txBody>
+          <a:bodyPr vert="horz" lIns="91440" tIns="45720" rIns="91440" bIns="45720" rtlCol="0"/>
+          <a:lstStyle/>
+          <a:p>
+            <a:pPr lvl="0"/>
+            <a:r>
+              <a:rPr lang="en-US"/>
+              <a:t>Click to edit Master text styles</a:t>
+            </a:r>
+          </a:p>
+          <a:p>
+            <a:pPr lvl="1"/>
+            <a:r>
+              <a:rPr lang="en-US"/>
+              <a:t>Second level</a:t>
+            </a:r>
+          </a:p>
+          <a:p>
+            <a:pPr lvl="2"/>
+            <a:r>
+              <a:rPr lang="en-US"/>
+              <a:t>Third level</a:t>
+            </a:r>
+          </a:p>
+          <a:p>
+            <a:pPr lvl="3"/>
+            <a:r>
+              <a:rPr lang="en-US"/>
+              <a:t>Fourth level</a:t>
+            </a:r>
+          </a:p>
+          <a:p>
+            <a:pPr lvl="4"/>
+            <a:r>
+              <a:rPr lang="en-US"/>
+              <a:t>Fifth level</a:t>
+            </a:r>
+          </a:p>
+        </p:txBody>
+      </p:sp>
+      <p:sp>
+        <p:nvSpPr>
+          <p:cNvPr id="6" name="Footer Placeholder 5"/>
+          <p:cNvSpPr>
+            <a:spLocks noGrp="1"/>
+          </p:cNvSpPr>
+          <p:nvPr>
+            <p:ph type="ftr" sz="quarter" idx="4"/>
+          </p:nvPr>
+        </p:nvSpPr>
+        <p:spPr>
+          <a:xfrm>
+            <a:off x="0" y="8685213"/>
+            <a:ext cx="2971800" cy="458787"/>
+          </a:xfrm>
+          <a:prstGeom prst="rect">
+            <a:avLst/>
+          </a:prstGeom>
+        </p:spPr>
+        <p:txBody>
+          <a:bodyPr vert="horz" lIns="91440" tIns="45720" rIns="91440" bIns="45720" rtlCol="0" anchor="b"/>
+          <a:lstStyle>
+            <a:lvl1pPr algn="l">
+              <a:defRPr sz="1200"/>
+            </a:lvl1pPr>
+          </a:lstStyle>
+          <a:p>
+            <a:endParaRPr lang="en-US"/>
+          </a:p>
+        </p:txBody>
+      </p:sp>
+      <p:sp>
+        <p:nvSpPr>
+          <p:cNvPr id="7" name="Slide Number Placeholder 6"/>
+          <p:cNvSpPr>
+            <a:spLocks noGrp="1"/>
+          </p:cNvSpPr>
+          <p:nvPr>
+            <p:ph type="sldNum" sz="quarter" idx="5"/>
+          </p:nvPr>
+        </p:nvSpPr>
+        <p:spPr>
+          <a:xfrm>
+            <a:off x="3884613" y="8685213"/>
+            <a:ext cx="2971800" cy="458787"/>
+          </a:xfrm>
+          <a:prstGeom prst="rect">
+            <a:avLst/>
+          </a:prstGeom>
+        </p:spPr>
+        <p:txBody>
+          <a:bodyPr vert="horz" lIns="91440" tIns="45720" rIns="91440" bIns="45720" rtlCol="0" anchor="b"/>
+          <a:lstStyle>
+            <a:lvl1pPr algn="r">
+              <a:defRPr sz="1200"/>
+            </a:lvl1pPr>
+          </a:lstStyle>
+          <a:p>
+            <a:fld id="{6C63499C-1FAC-4F66-96F8-6DA2CC28B748}" type="slidenum">
+              <a:rPr lang="en-US" smtClean="0"/>
+              <a:t>‹#›</a:t>
+            </a:fld>
+            <a:endParaRPr lang="en-US"/>
+          </a:p>
+        </p:txBody>
+      </p:sp>
+    </p:spTree>
+    <p:extLst>
+      <p:ext uri="{BB962C8B-B14F-4D97-AF65-F5344CB8AC3E}">
+        <p14:creationId xmlns:p14="http://schemas.microsoft.com/office/powerpoint/2010/main" val="817539779"/>
+      </p:ext>
+    </p:extLst>
+  </p:cSld>
+  <p:clrMap bg1="lt1" tx1="dk1" bg2="lt2" tx2="dk2" accent1="accent1" accent2="accent2" accent3="accent3" accent4="accent4" accent5="accent5" accent6="accent6" hlink="hlink" folHlink="folHlink"/>
+  <p:notesStyle>
+    <a:lvl1pPr marL="0" algn="l" defTabSz="914400" rtl="0" eaLnBrk="1" latinLnBrk="0" hangingPunct="1">
+      <a:defRPr sz="1200" kern="1200">
+        <a:solidFill>
+          <a:schemeClr val="tx1"/>
+        </a:solidFill>
+        <a:latin typeface="+mn-lt"/>
+        <a:ea typeface="+mn-ea"/>
+        <a:cs typeface="+mn-cs"/>
+      </a:defRPr>
+    </a:lvl1pPr>
+    <a:lvl2pPr marL="457200" algn="l" defTabSz="914400" rtl="0" eaLnBrk="1" latinLnBrk="0" hangingPunct="1">
+      <a:defRPr sz="1200" kern="1200">
+        <a:solidFill>
+          <a:schemeClr val="tx1"/>
+        </a:solidFill>
+        <a:latin typeface="+mn-lt"/>
+        <a:ea typeface="+mn-ea"/>
+        <a:cs typeface="+mn-cs"/>
+      </a:defRPr>
+    </a:lvl2pPr>
+    <a:lvl3pPr marL="914400" algn="l" defTabSz="914400" rtl="0" eaLnBrk="1" latinLnBrk="0" hangingPunct="1">
+      <a:defRPr sz="1200" kern="1200">
+        <a:solidFill>
+          <a:schemeClr val="tx1"/>
+        </a:solidFill>
+        <a:latin typeface="+mn-lt"/>
+        <a:ea typeface="+mn-ea"/>
+        <a:cs typeface="+mn-cs"/>
+      </a:defRPr>
+    </a:lvl3pPr>
+    <a:lvl4pPr marL="1371600" algn="l" defTabSz="914400" rtl="0" eaLnBrk="1" latinLnBrk="0" hangingPunct="1">
+      <a:defRPr sz="1200" kern="1200">
+        <a:solidFill>
+          <a:schemeClr val="tx1"/>
+        </a:solidFill>
+        <a:latin typeface="+mn-lt"/>
+        <a:ea typeface="+mn-ea"/>
+        <a:cs typeface="+mn-cs"/>
+      </a:defRPr>
+    </a:lvl4pPr>
+    <a:lvl5pPr marL="1828800" algn="l" defTabSz="914400" rtl="0" eaLnBrk="1" latinLnBrk="0" hangingPunct="1">
+      <a:defRPr sz="1200" kern="1200">
+        <a:solidFill>
+          <a:schemeClr val="tx1"/>
+        </a:solidFill>
+        <a:latin typeface="+mn-lt"/>
+        <a:ea typeface="+mn-ea"/>
+        <a:cs typeface="+mn-cs"/>
+      </a:defRPr>
+    </a:lvl5pPr>
+    <a:lvl6pPr marL="2286000" algn="l" defTabSz="914400" rtl="0" eaLnBrk="1" latinLnBrk="0" hangingPunct="1">
+      <a:defRPr sz="1200" kern="1200">
+        <a:solidFill>
+          <a:schemeClr val="tx1"/>
+        </a:solidFill>
+        <a:latin typeface="+mn-lt"/>
+        <a:ea typeface="+mn-ea"/>
+        <a:cs typeface="+mn-cs"/>
+      </a:defRPr>
+    </a:lvl6pPr>
+    <a:lvl7pPr marL="2743200" algn="l" defTabSz="914400" rtl="0" eaLnBrk="1" latinLnBrk="0" hangingPunct="1">
+      <a:defRPr sz="1200" kern="1200">
+        <a:solidFill>
+          <a:schemeClr val="tx1"/>
+        </a:solidFill>
+        <a:latin typeface="+mn-lt"/>
+        <a:ea typeface="+mn-ea"/>
+        <a:cs typeface="+mn-cs"/>
+      </a:defRPr>
+    </a:lvl7pPr>
+    <a:lvl8pPr marL="3200400" algn="l" defTabSz="914400" rtl="0" eaLnBrk="1" latinLnBrk="0" hangingPunct="1">
+      <a:defRPr sz="1200" kern="1200">
+        <a:solidFill>
+          <a:schemeClr val="tx1"/>
+        </a:solidFill>
+        <a:latin typeface="+mn-lt"/>
+        <a:ea typeface="+mn-ea"/>
+        <a:cs typeface="+mn-cs"/>
+      </a:defRPr>
+    </a:lvl8pPr>
+    <a:lvl9pPr marL="3657600" algn="l" defTabSz="914400" rtl="0" eaLnBrk="1" latinLnBrk="0" hangingPunct="1">
+      <a:defRPr sz="1200" kern="1200">
+        <a:solidFill>
+          <a:schemeClr val="tx1"/>
+        </a:solidFill>
+        <a:latin typeface="+mn-lt"/>
+        <a:ea typeface="+mn-ea"/>
+        <a:cs typeface="+mn-cs"/>
+      </a:defRPr>
+    </a:lvl9pPr>
+  </p:notesStyle>
+</p:notesMaster>
 </file>
 
 <file path=ppt/slideLayouts/slideLayout1.xml><?xml version="1.0" encoding="utf-8"?>
@@ -130,7 +684,13 @@
       </p:grpSpPr>
       <p:sp>
         <p:nvSpPr>
-          <p:cNvPr id="2" name="Title 1"/>
+          <p:cNvPr id="2" name="Title 1">
+            <a:extLst>
+              <a:ext uri="{FF2B5EF4-FFF2-40B4-BE49-F238E27FC236}">
+                <a16:creationId xmlns:a16="http://schemas.microsoft.com/office/drawing/2014/main" id="{65EB0F26-247A-F2E0-8FBA-6EA7974D69E5}"/>
+              </a:ext>
+            </a:extLst>
+          </p:cNvPr>
           <p:cNvSpPr>
             <a:spLocks noGrp="1"/>
           </p:cNvSpPr>
@@ -153,16 +713,21 @@
           </a:lstStyle>
           <a:p>
             <a:r>
-              <a:rPr lang="en-US" smtClean="0"/>
+              <a:rPr lang="en-US"/>
               <a:t>Click to edit Master title style</a:t>
             </a:r>
-            <a:endParaRPr lang="en-US"/>
-          </a:p>
-        </p:txBody>
-      </p:sp>
-      <p:sp>
-        <p:nvSpPr>
-          <p:cNvPr id="3" name="Subtitle 2"/>
+          </a:p>
+        </p:txBody>
+      </p:sp>
+      <p:sp>
+        <p:nvSpPr>
+          <p:cNvPr id="3" name="Subtitle 2">
+            <a:extLst>
+              <a:ext uri="{FF2B5EF4-FFF2-40B4-BE49-F238E27FC236}">
+                <a16:creationId xmlns:a16="http://schemas.microsoft.com/office/drawing/2014/main" id="{F394F308-CEE8-92BC-D91A-4212DEA015D6}"/>
+              </a:ext>
+            </a:extLst>
+          </p:cNvPr>
           <p:cNvSpPr>
             <a:spLocks noGrp="1"/>
           </p:cNvSpPr>
@@ -218,31 +783,36 @@
           </a:lstStyle>
           <a:p>
             <a:r>
+              <a:rPr lang="en-US"/>
+              <a:t>Click to edit Master subtitle style</a:t>
+            </a:r>
+          </a:p>
+        </p:txBody>
+      </p:sp>
+      <p:sp>
+        <p:nvSpPr>
+          <p:cNvPr id="4" name="Date Placeholder 3">
+            <a:extLst>
+              <a:ext uri="{FF2B5EF4-FFF2-40B4-BE49-F238E27FC236}">
+                <a16:creationId xmlns:a16="http://schemas.microsoft.com/office/drawing/2014/main" id="{B32794D3-11DF-A675-8D28-EC65EF27521E}"/>
+              </a:ext>
+            </a:extLst>
+          </p:cNvPr>
+          <p:cNvSpPr>
+            <a:spLocks noGrp="1"/>
+          </p:cNvSpPr>
+          <p:nvPr>
+            <p:ph type="dt" sz="half" idx="10"/>
+          </p:nvPr>
+        </p:nvSpPr>
+        <p:spPr/>
+        <p:txBody>
+          <a:bodyPr/>
+          <a:lstStyle/>
+          <a:p>
+            <a:fld id="{6383FAE1-13DE-4511-8C1B-C8AFB720664C}" type="datetimeFigureOut">
               <a:rPr lang="en-US" smtClean="0"/>
-              <a:t>Click to edit Master subtitle style</a:t>
-            </a:r>
-            <a:endParaRPr lang="en-US"/>
-          </a:p>
-        </p:txBody>
-      </p:sp>
-      <p:sp>
-        <p:nvSpPr>
-          <p:cNvPr id="4" name="Date Placeholder 3"/>
-          <p:cNvSpPr>
-            <a:spLocks noGrp="1"/>
-          </p:cNvSpPr>
-          <p:nvPr>
-            <p:ph type="dt" sz="half" idx="10"/>
-          </p:nvPr>
-        </p:nvSpPr>
-        <p:spPr/>
-        <p:txBody>
-          <a:bodyPr/>
-          <a:lstStyle/>
-          <a:p>
-            <a:fld id="{7F083F68-03B4-41A9-9EF5-87438ABC6FC7}" type="datetimeFigureOut">
-              <a:rPr lang="en-US" smtClean="0"/>
-              <a:t>5/29/2025</a:t>
+              <a:t>4/12/2026</a:t>
             </a:fld>
             <a:endParaRPr lang="en-US"/>
           </a:p>
@@ -250,7 +820,13 @@
       </p:sp>
       <p:sp>
         <p:nvSpPr>
-          <p:cNvPr id="5" name="Footer Placeholder 4"/>
+          <p:cNvPr id="5" name="Footer Placeholder 4">
+            <a:extLst>
+              <a:ext uri="{FF2B5EF4-FFF2-40B4-BE49-F238E27FC236}">
+                <a16:creationId xmlns:a16="http://schemas.microsoft.com/office/drawing/2014/main" id="{EC53FDAF-B83A-AE0A-B811-B7195D37FDD4}"/>
+              </a:ext>
+            </a:extLst>
+          </p:cNvPr>
           <p:cNvSpPr>
             <a:spLocks noGrp="1"/>
           </p:cNvSpPr>
@@ -269,7 +845,13 @@
       </p:sp>
       <p:sp>
         <p:nvSpPr>
-          <p:cNvPr id="6" name="Slide Number Placeholder 5"/>
+          <p:cNvPr id="6" name="Slide Number Placeholder 5">
+            <a:extLst>
+              <a:ext uri="{FF2B5EF4-FFF2-40B4-BE49-F238E27FC236}">
+                <a16:creationId xmlns:a16="http://schemas.microsoft.com/office/drawing/2014/main" id="{149530BD-9515-D107-426C-B72742CBF0BF}"/>
+              </a:ext>
+            </a:extLst>
+          </p:cNvPr>
           <p:cNvSpPr>
             <a:spLocks noGrp="1"/>
           </p:cNvSpPr>
@@ -282,7 +864,7 @@
           <a:bodyPr/>
           <a:lstStyle/>
           <a:p>
-            <a:fld id="{155C3AE7-3595-4F49-B06E-F09DD1E50683}" type="slidenum">
+            <a:fld id="{81BC7A09-79EE-44A0-8F92-750D7C83D871}" type="slidenum">
               <a:rPr lang="en-US" smtClean="0"/>
               <a:t>‹#›</a:t>
             </a:fld>
@@ -293,7 +875,7 @@
     </p:spTree>
     <p:extLst>
       <p:ext uri="{BB962C8B-B14F-4D97-AF65-F5344CB8AC3E}">
-        <p14:creationId xmlns:p14="http://schemas.microsoft.com/office/powerpoint/2010/main" val="2464866043"/>
+        <p14:creationId xmlns:p14="http://schemas.microsoft.com/office/powerpoint/2010/main" val="1449282697"/>
       </p:ext>
     </p:extLst>
   </p:cSld>
@@ -322,7 +904,13 @@
       </p:grpSpPr>
       <p:sp>
         <p:nvSpPr>
-          <p:cNvPr id="2" name="Title 1"/>
+          <p:cNvPr id="2" name="Title 1">
+            <a:extLst>
+              <a:ext uri="{FF2B5EF4-FFF2-40B4-BE49-F238E27FC236}">
+                <a16:creationId xmlns:a16="http://schemas.microsoft.com/office/drawing/2014/main" id="{A8B3002A-A21A-4F99-1BCE-F61C85D7B652}"/>
+              </a:ext>
+            </a:extLst>
+          </p:cNvPr>
           <p:cNvSpPr>
             <a:spLocks noGrp="1"/>
           </p:cNvSpPr>
@@ -336,83 +924,93 @@
           <a:lstStyle/>
           <a:p>
             <a:r>
+              <a:rPr lang="en-US"/>
+              <a:t>Click to edit Master title style</a:t>
+            </a:r>
+          </a:p>
+        </p:txBody>
+      </p:sp>
+      <p:sp>
+        <p:nvSpPr>
+          <p:cNvPr id="3" name="Vertical Text Placeholder 2">
+            <a:extLst>
+              <a:ext uri="{FF2B5EF4-FFF2-40B4-BE49-F238E27FC236}">
+                <a16:creationId xmlns:a16="http://schemas.microsoft.com/office/drawing/2014/main" id="{50E85D03-9A7F-4A9E-379E-2DEA86D21FC4}"/>
+              </a:ext>
+            </a:extLst>
+          </p:cNvPr>
+          <p:cNvSpPr>
+            <a:spLocks noGrp="1"/>
+          </p:cNvSpPr>
+          <p:nvPr>
+            <p:ph type="body" orient="vert" idx="1"/>
+          </p:nvPr>
+        </p:nvSpPr>
+        <p:spPr/>
+        <p:txBody>
+          <a:bodyPr vert="eaVert"/>
+          <a:lstStyle/>
+          <a:p>
+            <a:pPr lvl="0"/>
+            <a:r>
+              <a:rPr lang="en-US"/>
+              <a:t>Click to edit Master text styles</a:t>
+            </a:r>
+          </a:p>
+          <a:p>
+            <a:pPr lvl="1"/>
+            <a:r>
+              <a:rPr lang="en-US"/>
+              <a:t>Second level</a:t>
+            </a:r>
+          </a:p>
+          <a:p>
+            <a:pPr lvl="2"/>
+            <a:r>
+              <a:rPr lang="en-US"/>
+              <a:t>Third level</a:t>
+            </a:r>
+          </a:p>
+          <a:p>
+            <a:pPr lvl="3"/>
+            <a:r>
+              <a:rPr lang="en-US"/>
+              <a:t>Fourth level</a:t>
+            </a:r>
+          </a:p>
+          <a:p>
+            <a:pPr lvl="4"/>
+            <a:r>
+              <a:rPr lang="en-US"/>
+              <a:t>Fifth level</a:t>
+            </a:r>
+          </a:p>
+        </p:txBody>
+      </p:sp>
+      <p:sp>
+        <p:nvSpPr>
+          <p:cNvPr id="4" name="Date Placeholder 3">
+            <a:extLst>
+              <a:ext uri="{FF2B5EF4-FFF2-40B4-BE49-F238E27FC236}">
+                <a16:creationId xmlns:a16="http://schemas.microsoft.com/office/drawing/2014/main" id="{DFDEEFB4-95FB-FEDD-75E7-143E7ED29C8A}"/>
+              </a:ext>
+            </a:extLst>
+          </p:cNvPr>
+          <p:cNvSpPr>
+            <a:spLocks noGrp="1"/>
+          </p:cNvSpPr>
+          <p:nvPr>
+            <p:ph type="dt" sz="half" idx="10"/>
+          </p:nvPr>
+        </p:nvSpPr>
+        <p:spPr/>
+        <p:txBody>
+          <a:bodyPr/>
+          <a:lstStyle/>
+          <a:p>
+            <a:fld id="{6383FAE1-13DE-4511-8C1B-C8AFB720664C}" type="datetimeFigureOut">
               <a:rPr lang="en-US" smtClean="0"/>
-              <a:t>Click to edit Master title style</a:t>
-            </a:r>
-            <a:endParaRPr lang="en-US"/>
-          </a:p>
-        </p:txBody>
-      </p:sp>
-      <p:sp>
-        <p:nvSpPr>
-          <p:cNvPr id="3" name="Vertical Text Placeholder 2"/>
-          <p:cNvSpPr>
-            <a:spLocks noGrp="1"/>
-          </p:cNvSpPr>
-          <p:nvPr>
-            <p:ph type="body" orient="vert" idx="1"/>
-          </p:nvPr>
-        </p:nvSpPr>
-        <p:spPr/>
-        <p:txBody>
-          <a:bodyPr vert="eaVert"/>
-          <a:lstStyle/>
-          <a:p>
-            <a:pPr lvl="0"/>
-            <a:r>
-              <a:rPr lang="en-US" smtClean="0"/>
-              <a:t>Edit Master text styles</a:t>
-            </a:r>
-          </a:p>
-          <a:p>
-            <a:pPr lvl="1"/>
-            <a:r>
-              <a:rPr lang="en-US" smtClean="0"/>
-              <a:t>Second level</a:t>
-            </a:r>
-          </a:p>
-          <a:p>
-            <a:pPr lvl="2"/>
-            <a:r>
-              <a:rPr lang="en-US" smtClean="0"/>
-              <a:t>Third level</a:t>
-            </a:r>
-          </a:p>
-          <a:p>
-            <a:pPr lvl="3"/>
-            <a:r>
-              <a:rPr lang="en-US" smtClean="0"/>
-              <a:t>Fourth level</a:t>
-            </a:r>
-          </a:p>
-          <a:p>
-            <a:pPr lvl="4"/>
-            <a:r>
-              <a:rPr lang="en-US" smtClean="0"/>
-              <a:t>Fifth level</a:t>
-            </a:r>
-            <a:endParaRPr lang="en-US"/>
-          </a:p>
-        </p:txBody>
-      </p:sp>
-      <p:sp>
-        <p:nvSpPr>
-          <p:cNvPr id="4" name="Date Placeholder 3"/>
-          <p:cNvSpPr>
-            <a:spLocks noGrp="1"/>
-          </p:cNvSpPr>
-          <p:nvPr>
-            <p:ph type="dt" sz="half" idx="10"/>
-          </p:nvPr>
-        </p:nvSpPr>
-        <p:spPr/>
-        <p:txBody>
-          <a:bodyPr/>
-          <a:lstStyle/>
-          <a:p>
-            <a:fld id="{7F083F68-03B4-41A9-9EF5-87438ABC6FC7}" type="datetimeFigureOut">
-              <a:rPr lang="en-US" smtClean="0"/>
-              <a:t>5/29/2025</a:t>
+              <a:t>4/12/2026</a:t>
             </a:fld>
             <a:endParaRPr lang="en-US"/>
           </a:p>
@@ -420,7 +1018,13 @@
       </p:sp>
       <p:sp>
         <p:nvSpPr>
-          <p:cNvPr id="5" name="Footer Placeholder 4"/>
+          <p:cNvPr id="5" name="Footer Placeholder 4">
+            <a:extLst>
+              <a:ext uri="{FF2B5EF4-FFF2-40B4-BE49-F238E27FC236}">
+                <a16:creationId xmlns:a16="http://schemas.microsoft.com/office/drawing/2014/main" id="{F1BCE0D7-1712-FF0C-D965-BFD5AE1610F2}"/>
+              </a:ext>
+            </a:extLst>
+          </p:cNvPr>
           <p:cNvSpPr>
             <a:spLocks noGrp="1"/>
           </p:cNvSpPr>
@@ -439,7 +1043,13 @@
       </p:sp>
       <p:sp>
         <p:nvSpPr>
-          <p:cNvPr id="6" name="Slide Number Placeholder 5"/>
+          <p:cNvPr id="6" name="Slide Number Placeholder 5">
+            <a:extLst>
+              <a:ext uri="{FF2B5EF4-FFF2-40B4-BE49-F238E27FC236}">
+                <a16:creationId xmlns:a16="http://schemas.microsoft.com/office/drawing/2014/main" id="{932632A1-4243-F65B-A2B0-3F2142C3415D}"/>
+              </a:ext>
+            </a:extLst>
+          </p:cNvPr>
           <p:cNvSpPr>
             <a:spLocks noGrp="1"/>
           </p:cNvSpPr>
@@ -452,7 +1062,7 @@
           <a:bodyPr/>
           <a:lstStyle/>
           <a:p>
-            <a:fld id="{155C3AE7-3595-4F49-B06E-F09DD1E50683}" type="slidenum">
+            <a:fld id="{81BC7A09-79EE-44A0-8F92-750D7C83D871}" type="slidenum">
               <a:rPr lang="en-US" smtClean="0"/>
               <a:t>‹#›</a:t>
             </a:fld>
@@ -463,7 +1073,7 @@
     </p:spTree>
     <p:extLst>
       <p:ext uri="{BB962C8B-B14F-4D97-AF65-F5344CB8AC3E}">
-        <p14:creationId xmlns:p14="http://schemas.microsoft.com/office/powerpoint/2010/main" val="90958113"/>
+        <p14:creationId xmlns:p14="http://schemas.microsoft.com/office/powerpoint/2010/main" val="4275079751"/>
       </p:ext>
     </p:extLst>
   </p:cSld>
@@ -492,7 +1102,13 @@
       </p:grpSpPr>
       <p:sp>
         <p:nvSpPr>
-          <p:cNvPr id="2" name="Vertical Title 1"/>
+          <p:cNvPr id="2" name="Vertical Title 1">
+            <a:extLst>
+              <a:ext uri="{FF2B5EF4-FFF2-40B4-BE49-F238E27FC236}">
+                <a16:creationId xmlns:a16="http://schemas.microsoft.com/office/drawing/2014/main" id="{72293F13-2480-AB35-1A68-57A54CE6CD63}"/>
+              </a:ext>
+            </a:extLst>
+          </p:cNvPr>
           <p:cNvSpPr>
             <a:spLocks noGrp="1"/>
           </p:cNvSpPr>
@@ -511,16 +1127,21 @@
           <a:lstStyle/>
           <a:p>
             <a:r>
-              <a:rPr lang="en-US" smtClean="0"/>
+              <a:rPr lang="en-US"/>
               <a:t>Click to edit Master title style</a:t>
             </a:r>
-            <a:endParaRPr lang="en-US"/>
-          </a:p>
-        </p:txBody>
-      </p:sp>
-      <p:sp>
-        <p:nvSpPr>
-          <p:cNvPr id="3" name="Vertical Text Placeholder 2"/>
+          </a:p>
+        </p:txBody>
+      </p:sp>
+      <p:sp>
+        <p:nvSpPr>
+          <p:cNvPr id="3" name="Vertical Text Placeholder 2">
+            <a:extLst>
+              <a:ext uri="{FF2B5EF4-FFF2-40B4-BE49-F238E27FC236}">
+                <a16:creationId xmlns:a16="http://schemas.microsoft.com/office/drawing/2014/main" id="{3BDA286C-2521-2961-CABA-5684DF43FB2A}"/>
+              </a:ext>
+            </a:extLst>
+          </p:cNvPr>
           <p:cNvSpPr>
             <a:spLocks noGrp="1"/>
           </p:cNvSpPr>
@@ -540,59 +1161,64 @@
           <a:p>
             <a:pPr lvl="0"/>
             <a:r>
+              <a:rPr lang="en-US"/>
+              <a:t>Click to edit Master text styles</a:t>
+            </a:r>
+          </a:p>
+          <a:p>
+            <a:pPr lvl="1"/>
+            <a:r>
+              <a:rPr lang="en-US"/>
+              <a:t>Second level</a:t>
+            </a:r>
+          </a:p>
+          <a:p>
+            <a:pPr lvl="2"/>
+            <a:r>
+              <a:rPr lang="en-US"/>
+              <a:t>Third level</a:t>
+            </a:r>
+          </a:p>
+          <a:p>
+            <a:pPr lvl="3"/>
+            <a:r>
+              <a:rPr lang="en-US"/>
+              <a:t>Fourth level</a:t>
+            </a:r>
+          </a:p>
+          <a:p>
+            <a:pPr lvl="4"/>
+            <a:r>
+              <a:rPr lang="en-US"/>
+              <a:t>Fifth level</a:t>
+            </a:r>
+          </a:p>
+        </p:txBody>
+      </p:sp>
+      <p:sp>
+        <p:nvSpPr>
+          <p:cNvPr id="4" name="Date Placeholder 3">
+            <a:extLst>
+              <a:ext uri="{FF2B5EF4-FFF2-40B4-BE49-F238E27FC236}">
+                <a16:creationId xmlns:a16="http://schemas.microsoft.com/office/drawing/2014/main" id="{74D5FF44-F63B-872A-DC8D-A873790A64A3}"/>
+              </a:ext>
+            </a:extLst>
+          </p:cNvPr>
+          <p:cNvSpPr>
+            <a:spLocks noGrp="1"/>
+          </p:cNvSpPr>
+          <p:nvPr>
+            <p:ph type="dt" sz="half" idx="10"/>
+          </p:nvPr>
+        </p:nvSpPr>
+        <p:spPr/>
+        <p:txBody>
+          <a:bodyPr/>
+          <a:lstStyle/>
+          <a:p>
+            <a:fld id="{6383FAE1-13DE-4511-8C1B-C8AFB720664C}" type="datetimeFigureOut">
               <a:rPr lang="en-US" smtClean="0"/>
-              <a:t>Edit Master text styles</a:t>
-            </a:r>
-          </a:p>
-          <a:p>
-            <a:pPr lvl="1"/>
-            <a:r>
-              <a:rPr lang="en-US" smtClean="0"/>
-              <a:t>Second level</a:t>
-            </a:r>
-          </a:p>
-          <a:p>
-            <a:pPr lvl="2"/>
-            <a:r>
-              <a:rPr lang="en-US" smtClean="0"/>
-              <a:t>Third level</a:t>
-            </a:r>
-          </a:p>
-          <a:p>
-            <a:pPr lvl="3"/>
-            <a:r>
-              <a:rPr lang="en-US" smtClean="0"/>
-              <a:t>Fourth level</a:t>
-            </a:r>
-          </a:p>
-          <a:p>
-            <a:pPr lvl="4"/>
-            <a:r>
-              <a:rPr lang="en-US" smtClean="0"/>
-              <a:t>Fifth level</a:t>
-            </a:r>
-            <a:endParaRPr lang="en-US"/>
-          </a:p>
-        </p:txBody>
-      </p:sp>
-      <p:sp>
-        <p:nvSpPr>
-          <p:cNvPr id="4" name="Date Placeholder 3"/>
-          <p:cNvSpPr>
-            <a:spLocks noGrp="1"/>
-          </p:cNvSpPr>
-          <p:nvPr>
-            <p:ph type="dt" sz="half" idx="10"/>
-          </p:nvPr>
-        </p:nvSpPr>
-        <p:spPr/>
-        <p:txBody>
-          <a:bodyPr/>
-          <a:lstStyle/>
-          <a:p>
-            <a:fld id="{7F083F68-03B4-41A9-9EF5-87438ABC6FC7}" type="datetimeFigureOut">
-              <a:rPr lang="en-US" smtClean="0"/>
-              <a:t>5/29/2025</a:t>
+              <a:t>4/12/2026</a:t>
             </a:fld>
             <a:endParaRPr lang="en-US"/>
           </a:p>
@@ -600,7 +1226,13 @@
       </p:sp>
       <p:sp>
         <p:nvSpPr>
-          <p:cNvPr id="5" name="Footer Placeholder 4"/>
+          <p:cNvPr id="5" name="Footer Placeholder 4">
+            <a:extLst>
+              <a:ext uri="{FF2B5EF4-FFF2-40B4-BE49-F238E27FC236}">
+                <a16:creationId xmlns:a16="http://schemas.microsoft.com/office/drawing/2014/main" id="{4E653A11-7793-38C6-0506-A6FBE9A02A10}"/>
+              </a:ext>
+            </a:extLst>
+          </p:cNvPr>
           <p:cNvSpPr>
             <a:spLocks noGrp="1"/>
           </p:cNvSpPr>
@@ -619,7 +1251,13 @@
       </p:sp>
       <p:sp>
         <p:nvSpPr>
-          <p:cNvPr id="6" name="Slide Number Placeholder 5"/>
+          <p:cNvPr id="6" name="Slide Number Placeholder 5">
+            <a:extLst>
+              <a:ext uri="{FF2B5EF4-FFF2-40B4-BE49-F238E27FC236}">
+                <a16:creationId xmlns:a16="http://schemas.microsoft.com/office/drawing/2014/main" id="{310962C0-F018-7629-445C-DDCA8AE1401B}"/>
+              </a:ext>
+            </a:extLst>
+          </p:cNvPr>
           <p:cNvSpPr>
             <a:spLocks noGrp="1"/>
           </p:cNvSpPr>
@@ -632,7 +1270,7 @@
           <a:bodyPr/>
           <a:lstStyle/>
           <a:p>
-            <a:fld id="{155C3AE7-3595-4F49-B06E-F09DD1E50683}" type="slidenum">
+            <a:fld id="{81BC7A09-79EE-44A0-8F92-750D7C83D871}" type="slidenum">
               <a:rPr lang="en-US" smtClean="0"/>
               <a:t>‹#›</a:t>
             </a:fld>
@@ -643,7 +1281,7 @@
     </p:spTree>
     <p:extLst>
       <p:ext uri="{BB962C8B-B14F-4D97-AF65-F5344CB8AC3E}">
-        <p14:creationId xmlns:p14="http://schemas.microsoft.com/office/powerpoint/2010/main" val="773416490"/>
+        <p14:creationId xmlns:p14="http://schemas.microsoft.com/office/powerpoint/2010/main" val="2612998807"/>
       </p:ext>
     </p:extLst>
   </p:cSld>
@@ -672,7 +1310,13 @@
       </p:grpSpPr>
       <p:sp>
         <p:nvSpPr>
-          <p:cNvPr id="2" name="Title 1"/>
+          <p:cNvPr id="2" name="Title 1">
+            <a:extLst>
+              <a:ext uri="{FF2B5EF4-FFF2-40B4-BE49-F238E27FC236}">
+                <a16:creationId xmlns:a16="http://schemas.microsoft.com/office/drawing/2014/main" id="{84CE7E77-8771-0BA4-B1D5-7F1DE0138C3D}"/>
+              </a:ext>
+            </a:extLst>
+          </p:cNvPr>
           <p:cNvSpPr>
             <a:spLocks noGrp="1"/>
           </p:cNvSpPr>
@@ -686,83 +1330,93 @@
           <a:lstStyle/>
           <a:p>
             <a:r>
+              <a:rPr lang="en-US" dirty="0"/>
+              <a:t>Click to edit Master title style</a:t>
+            </a:r>
+          </a:p>
+        </p:txBody>
+      </p:sp>
+      <p:sp>
+        <p:nvSpPr>
+          <p:cNvPr id="3" name="Content Placeholder 2">
+            <a:extLst>
+              <a:ext uri="{FF2B5EF4-FFF2-40B4-BE49-F238E27FC236}">
+                <a16:creationId xmlns:a16="http://schemas.microsoft.com/office/drawing/2014/main" id="{9543F30B-85C4-D934-2F30-179E3FCE9424}"/>
+              </a:ext>
+            </a:extLst>
+          </p:cNvPr>
+          <p:cNvSpPr>
+            <a:spLocks noGrp="1"/>
+          </p:cNvSpPr>
+          <p:nvPr>
+            <p:ph idx="1"/>
+          </p:nvPr>
+        </p:nvSpPr>
+        <p:spPr/>
+        <p:txBody>
+          <a:bodyPr/>
+          <a:lstStyle/>
+          <a:p>
+            <a:pPr lvl="0"/>
+            <a:r>
+              <a:rPr lang="en-US" dirty="0"/>
+              <a:t>Click to edit Master text styles</a:t>
+            </a:r>
+          </a:p>
+          <a:p>
+            <a:pPr lvl="1"/>
+            <a:r>
+              <a:rPr lang="en-US" dirty="0"/>
+              <a:t>Second level</a:t>
+            </a:r>
+          </a:p>
+          <a:p>
+            <a:pPr lvl="2"/>
+            <a:r>
+              <a:rPr lang="en-US" dirty="0"/>
+              <a:t>Third level</a:t>
+            </a:r>
+          </a:p>
+          <a:p>
+            <a:pPr lvl="3"/>
+            <a:r>
+              <a:rPr lang="en-US" dirty="0"/>
+              <a:t>Fourth level</a:t>
+            </a:r>
+          </a:p>
+          <a:p>
+            <a:pPr lvl="4"/>
+            <a:r>
+              <a:rPr lang="en-US" dirty="0"/>
+              <a:t>Fifth level</a:t>
+            </a:r>
+          </a:p>
+        </p:txBody>
+      </p:sp>
+      <p:sp>
+        <p:nvSpPr>
+          <p:cNvPr id="4" name="Date Placeholder 3">
+            <a:extLst>
+              <a:ext uri="{FF2B5EF4-FFF2-40B4-BE49-F238E27FC236}">
+                <a16:creationId xmlns:a16="http://schemas.microsoft.com/office/drawing/2014/main" id="{7C8EF7AF-5CE7-4387-31F9-79D35620609B}"/>
+              </a:ext>
+            </a:extLst>
+          </p:cNvPr>
+          <p:cNvSpPr>
+            <a:spLocks noGrp="1"/>
+          </p:cNvSpPr>
+          <p:nvPr>
+            <p:ph type="dt" sz="half" idx="10"/>
+          </p:nvPr>
+        </p:nvSpPr>
+        <p:spPr/>
+        <p:txBody>
+          <a:bodyPr/>
+          <a:lstStyle/>
+          <a:p>
+            <a:fld id="{6383FAE1-13DE-4511-8C1B-C8AFB720664C}" type="datetimeFigureOut">
               <a:rPr lang="en-US" smtClean="0"/>
-              <a:t>Click to edit Master title style</a:t>
-            </a:r>
-            <a:endParaRPr lang="en-US"/>
-          </a:p>
-        </p:txBody>
-      </p:sp>
-      <p:sp>
-        <p:nvSpPr>
-          <p:cNvPr id="3" name="Content Placeholder 2"/>
-          <p:cNvSpPr>
-            <a:spLocks noGrp="1"/>
-          </p:cNvSpPr>
-          <p:nvPr>
-            <p:ph idx="1"/>
-          </p:nvPr>
-        </p:nvSpPr>
-        <p:spPr/>
-        <p:txBody>
-          <a:bodyPr/>
-          <a:lstStyle/>
-          <a:p>
-            <a:pPr lvl="0"/>
-            <a:r>
-              <a:rPr lang="en-US" smtClean="0"/>
-              <a:t>Edit Master text styles</a:t>
-            </a:r>
-          </a:p>
-          <a:p>
-            <a:pPr lvl="1"/>
-            <a:r>
-              <a:rPr lang="en-US" smtClean="0"/>
-              <a:t>Second level</a:t>
-            </a:r>
-          </a:p>
-          <a:p>
-            <a:pPr lvl="2"/>
-            <a:r>
-              <a:rPr lang="en-US" smtClean="0"/>
-              <a:t>Third level</a:t>
-            </a:r>
-          </a:p>
-          <a:p>
-            <a:pPr lvl="3"/>
-            <a:r>
-              <a:rPr lang="en-US" smtClean="0"/>
-              <a:t>Fourth level</a:t>
-            </a:r>
-          </a:p>
-          <a:p>
-            <a:pPr lvl="4"/>
-            <a:r>
-              <a:rPr lang="en-US" smtClean="0"/>
-              <a:t>Fifth level</a:t>
-            </a:r>
-            <a:endParaRPr lang="en-US"/>
-          </a:p>
-        </p:txBody>
-      </p:sp>
-      <p:sp>
-        <p:nvSpPr>
-          <p:cNvPr id="4" name="Date Placeholder 3"/>
-          <p:cNvSpPr>
-            <a:spLocks noGrp="1"/>
-          </p:cNvSpPr>
-          <p:nvPr>
-            <p:ph type="dt" sz="half" idx="10"/>
-          </p:nvPr>
-        </p:nvSpPr>
-        <p:spPr/>
-        <p:txBody>
-          <a:bodyPr/>
-          <a:lstStyle/>
-          <a:p>
-            <a:fld id="{7F083F68-03B4-41A9-9EF5-87438ABC6FC7}" type="datetimeFigureOut">
-              <a:rPr lang="en-US" smtClean="0"/>
-              <a:t>5/29/2025</a:t>
+              <a:t>4/12/2026</a:t>
             </a:fld>
             <a:endParaRPr lang="en-US"/>
           </a:p>
@@ -770,7 +1424,13 @@
       </p:sp>
       <p:sp>
         <p:nvSpPr>
-          <p:cNvPr id="5" name="Footer Placeholder 4"/>
+          <p:cNvPr id="5" name="Footer Placeholder 4">
+            <a:extLst>
+              <a:ext uri="{FF2B5EF4-FFF2-40B4-BE49-F238E27FC236}">
+                <a16:creationId xmlns:a16="http://schemas.microsoft.com/office/drawing/2014/main" id="{B0FCCC03-E434-4684-B55E-3F2D39916923}"/>
+              </a:ext>
+            </a:extLst>
+          </p:cNvPr>
           <p:cNvSpPr>
             <a:spLocks noGrp="1"/>
           </p:cNvSpPr>
@@ -789,7 +1449,13 @@
       </p:sp>
       <p:sp>
         <p:nvSpPr>
-          <p:cNvPr id="6" name="Slide Number Placeholder 5"/>
+          <p:cNvPr id="6" name="Slide Number Placeholder 5">
+            <a:extLst>
+              <a:ext uri="{FF2B5EF4-FFF2-40B4-BE49-F238E27FC236}">
+                <a16:creationId xmlns:a16="http://schemas.microsoft.com/office/drawing/2014/main" id="{BA1F3B05-B983-07A3-4B58-9D2E18438894}"/>
+              </a:ext>
+            </a:extLst>
+          </p:cNvPr>
           <p:cNvSpPr>
             <a:spLocks noGrp="1"/>
           </p:cNvSpPr>
@@ -802,7 +1468,7 @@
           <a:bodyPr/>
           <a:lstStyle/>
           <a:p>
-            <a:fld id="{155C3AE7-3595-4F49-B06E-F09DD1E50683}" type="slidenum">
+            <a:fld id="{81BC7A09-79EE-44A0-8F92-750D7C83D871}" type="slidenum">
               <a:rPr lang="en-US" smtClean="0"/>
               <a:t>‹#›</a:t>
             </a:fld>
@@ -813,7 +1479,7 @@
     </p:spTree>
     <p:extLst>
       <p:ext uri="{BB962C8B-B14F-4D97-AF65-F5344CB8AC3E}">
-        <p14:creationId xmlns:p14="http://schemas.microsoft.com/office/powerpoint/2010/main" val="259672817"/>
+        <p14:creationId xmlns:p14="http://schemas.microsoft.com/office/powerpoint/2010/main" val="1596036442"/>
       </p:ext>
     </p:extLst>
   </p:cSld>
@@ -842,7 +1508,13 @@
       </p:grpSpPr>
       <p:sp>
         <p:nvSpPr>
-          <p:cNvPr id="2" name="Title 1"/>
+          <p:cNvPr id="2" name="Title 1">
+            <a:extLst>
+              <a:ext uri="{FF2B5EF4-FFF2-40B4-BE49-F238E27FC236}">
+                <a16:creationId xmlns:a16="http://schemas.microsoft.com/office/drawing/2014/main" id="{5F223C21-D6A5-2D17-9BFA-70B3353D6A08}"/>
+              </a:ext>
+            </a:extLst>
+          </p:cNvPr>
           <p:cNvSpPr>
             <a:spLocks noGrp="1"/>
           </p:cNvSpPr>
@@ -865,16 +1537,21 @@
           </a:lstStyle>
           <a:p>
             <a:r>
-              <a:rPr lang="en-US" smtClean="0"/>
+              <a:rPr lang="en-US"/>
               <a:t>Click to edit Master title style</a:t>
             </a:r>
-            <a:endParaRPr lang="en-US"/>
-          </a:p>
-        </p:txBody>
-      </p:sp>
-      <p:sp>
-        <p:nvSpPr>
-          <p:cNvPr id="3" name="Text Placeholder 2"/>
+          </a:p>
+        </p:txBody>
+      </p:sp>
+      <p:sp>
+        <p:nvSpPr>
+          <p:cNvPr id="3" name="Text Placeholder 2">
+            <a:extLst>
+              <a:ext uri="{FF2B5EF4-FFF2-40B4-BE49-F238E27FC236}">
+                <a16:creationId xmlns:a16="http://schemas.microsoft.com/office/drawing/2014/main" id="{E92D89B8-191B-6AAD-5D5E-32B357265743}"/>
+              </a:ext>
+            </a:extLst>
+          </p:cNvPr>
           <p:cNvSpPr>
             <a:spLocks noGrp="1"/>
           </p:cNvSpPr>
@@ -985,30 +1662,36 @@
           <a:p>
             <a:pPr lvl="0"/>
             <a:r>
+              <a:rPr lang="en-US"/>
+              <a:t>Click to edit Master text styles</a:t>
+            </a:r>
+          </a:p>
+        </p:txBody>
+      </p:sp>
+      <p:sp>
+        <p:nvSpPr>
+          <p:cNvPr id="4" name="Date Placeholder 3">
+            <a:extLst>
+              <a:ext uri="{FF2B5EF4-FFF2-40B4-BE49-F238E27FC236}">
+                <a16:creationId xmlns:a16="http://schemas.microsoft.com/office/drawing/2014/main" id="{54CC528A-1563-9376-E089-4DA80AD11D0C}"/>
+              </a:ext>
+            </a:extLst>
+          </p:cNvPr>
+          <p:cNvSpPr>
+            <a:spLocks noGrp="1"/>
+          </p:cNvSpPr>
+          <p:nvPr>
+            <p:ph type="dt" sz="half" idx="10"/>
+          </p:nvPr>
+        </p:nvSpPr>
+        <p:spPr/>
+        <p:txBody>
+          <a:bodyPr/>
+          <a:lstStyle/>
+          <a:p>
+            <a:fld id="{6383FAE1-13DE-4511-8C1B-C8AFB720664C}" type="datetimeFigureOut">
               <a:rPr lang="en-US" smtClean="0"/>
-              <a:t>Edit Master text styles</a:t>
-            </a:r>
-          </a:p>
-        </p:txBody>
-      </p:sp>
-      <p:sp>
-        <p:nvSpPr>
-          <p:cNvPr id="4" name="Date Placeholder 3"/>
-          <p:cNvSpPr>
-            <a:spLocks noGrp="1"/>
-          </p:cNvSpPr>
-          <p:nvPr>
-            <p:ph type="dt" sz="half" idx="10"/>
-          </p:nvPr>
-        </p:nvSpPr>
-        <p:spPr/>
-        <p:txBody>
-          <a:bodyPr/>
-          <a:lstStyle/>
-          <a:p>
-            <a:fld id="{7F083F68-03B4-41A9-9EF5-87438ABC6FC7}" type="datetimeFigureOut">
-              <a:rPr lang="en-US" smtClean="0"/>
-              <a:t>5/29/2025</a:t>
+              <a:t>4/12/2026</a:t>
             </a:fld>
             <a:endParaRPr lang="en-US"/>
           </a:p>
@@ -1016,7 +1699,13 @@
       </p:sp>
       <p:sp>
         <p:nvSpPr>
-          <p:cNvPr id="5" name="Footer Placeholder 4"/>
+          <p:cNvPr id="5" name="Footer Placeholder 4">
+            <a:extLst>
+              <a:ext uri="{FF2B5EF4-FFF2-40B4-BE49-F238E27FC236}">
+                <a16:creationId xmlns:a16="http://schemas.microsoft.com/office/drawing/2014/main" id="{0519A01D-6FDA-C269-FF95-3FDB205C8E37}"/>
+              </a:ext>
+            </a:extLst>
+          </p:cNvPr>
           <p:cNvSpPr>
             <a:spLocks noGrp="1"/>
           </p:cNvSpPr>
@@ -1035,7 +1724,13 @@
       </p:sp>
       <p:sp>
         <p:nvSpPr>
-          <p:cNvPr id="6" name="Slide Number Placeholder 5"/>
+          <p:cNvPr id="6" name="Slide Number Placeholder 5">
+            <a:extLst>
+              <a:ext uri="{FF2B5EF4-FFF2-40B4-BE49-F238E27FC236}">
+                <a16:creationId xmlns:a16="http://schemas.microsoft.com/office/drawing/2014/main" id="{AA980A21-61AC-4B39-D886-3A327DB7346D}"/>
+              </a:ext>
+            </a:extLst>
+          </p:cNvPr>
           <p:cNvSpPr>
             <a:spLocks noGrp="1"/>
           </p:cNvSpPr>
@@ -1048,7 +1743,7 @@
           <a:bodyPr/>
           <a:lstStyle/>
           <a:p>
-            <a:fld id="{155C3AE7-3595-4F49-B06E-F09DD1E50683}" type="slidenum">
+            <a:fld id="{81BC7A09-79EE-44A0-8F92-750D7C83D871}" type="slidenum">
               <a:rPr lang="en-US" smtClean="0"/>
               <a:t>‹#›</a:t>
             </a:fld>
@@ -1059,7 +1754,7 @@
     </p:spTree>
     <p:extLst>
       <p:ext uri="{BB962C8B-B14F-4D97-AF65-F5344CB8AC3E}">
-        <p14:creationId xmlns:p14="http://schemas.microsoft.com/office/powerpoint/2010/main" val="687700900"/>
+        <p14:creationId xmlns:p14="http://schemas.microsoft.com/office/powerpoint/2010/main" val="941114025"/>
       </p:ext>
     </p:extLst>
   </p:cSld>
@@ -1088,7 +1783,13 @@
       </p:grpSpPr>
       <p:sp>
         <p:nvSpPr>
-          <p:cNvPr id="2" name="Title 1"/>
+          <p:cNvPr id="2" name="Title 1">
+            <a:extLst>
+              <a:ext uri="{FF2B5EF4-FFF2-40B4-BE49-F238E27FC236}">
+                <a16:creationId xmlns:a16="http://schemas.microsoft.com/office/drawing/2014/main" id="{F2903C29-6DED-2A1F-5B4D-128B63652F74}"/>
+              </a:ext>
+            </a:extLst>
+          </p:cNvPr>
           <p:cNvSpPr>
             <a:spLocks noGrp="1"/>
           </p:cNvSpPr>
@@ -1102,16 +1803,21 @@
           <a:lstStyle/>
           <a:p>
             <a:r>
-              <a:rPr lang="en-US" smtClean="0"/>
+              <a:rPr lang="en-US"/>
               <a:t>Click to edit Master title style</a:t>
             </a:r>
-            <a:endParaRPr lang="en-US"/>
-          </a:p>
-        </p:txBody>
-      </p:sp>
-      <p:sp>
-        <p:nvSpPr>
-          <p:cNvPr id="3" name="Content Placeholder 2"/>
+          </a:p>
+        </p:txBody>
+      </p:sp>
+      <p:sp>
+        <p:nvSpPr>
+          <p:cNvPr id="3" name="Content Placeholder 2">
+            <a:extLst>
+              <a:ext uri="{FF2B5EF4-FFF2-40B4-BE49-F238E27FC236}">
+                <a16:creationId xmlns:a16="http://schemas.microsoft.com/office/drawing/2014/main" id="{16494ECB-0FCA-1AD0-F19A-27A4C16DC0F2}"/>
+              </a:ext>
+            </a:extLst>
+          </p:cNvPr>
           <p:cNvSpPr>
             <a:spLocks noGrp="1"/>
           </p:cNvSpPr>
@@ -1131,44 +1837,49 @@
           <a:p>
             <a:pPr lvl="0"/>
             <a:r>
-              <a:rPr lang="en-US" smtClean="0"/>
-              <a:t>Edit Master text styles</a:t>
+              <a:rPr lang="en-US"/>
+              <a:t>Click to edit Master text styles</a:t>
             </a:r>
           </a:p>
           <a:p>
             <a:pPr lvl="1"/>
             <a:r>
-              <a:rPr lang="en-US" smtClean="0"/>
+              <a:rPr lang="en-US"/>
               <a:t>Second level</a:t>
             </a:r>
           </a:p>
           <a:p>
             <a:pPr lvl="2"/>
             <a:r>
-              <a:rPr lang="en-US" smtClean="0"/>
+              <a:rPr lang="en-US"/>
               <a:t>Third level</a:t>
             </a:r>
           </a:p>
           <a:p>
             <a:pPr lvl="3"/>
             <a:r>
-              <a:rPr lang="en-US" smtClean="0"/>
+              <a:rPr lang="en-US"/>
               <a:t>Fourth level</a:t>
             </a:r>
           </a:p>
           <a:p>
             <a:pPr lvl="4"/>
             <a:r>
-              <a:rPr lang="en-US" smtClean="0"/>
+              <a:rPr lang="en-US"/>
               <a:t>Fifth level</a:t>
             </a:r>
-            <a:endParaRPr lang="en-US"/>
-          </a:p>
-        </p:txBody>
-      </p:sp>
-      <p:sp>
-        <p:nvSpPr>
-          <p:cNvPr id="4" name="Content Placeholder 3"/>
+          </a:p>
+        </p:txBody>
+      </p:sp>
+      <p:sp>
+        <p:nvSpPr>
+          <p:cNvPr id="4" name="Content Placeholder 3">
+            <a:extLst>
+              <a:ext uri="{FF2B5EF4-FFF2-40B4-BE49-F238E27FC236}">
+                <a16:creationId xmlns:a16="http://schemas.microsoft.com/office/drawing/2014/main" id="{A07402C2-E657-5A54-9627-8C9CBCBBE0A7}"/>
+              </a:ext>
+            </a:extLst>
+          </p:cNvPr>
           <p:cNvSpPr>
             <a:spLocks noGrp="1"/>
           </p:cNvSpPr>
@@ -1188,59 +1899,64 @@
           <a:p>
             <a:pPr lvl="0"/>
             <a:r>
+              <a:rPr lang="en-US"/>
+              <a:t>Click to edit Master text styles</a:t>
+            </a:r>
+          </a:p>
+          <a:p>
+            <a:pPr lvl="1"/>
+            <a:r>
+              <a:rPr lang="en-US"/>
+              <a:t>Second level</a:t>
+            </a:r>
+          </a:p>
+          <a:p>
+            <a:pPr lvl="2"/>
+            <a:r>
+              <a:rPr lang="en-US"/>
+              <a:t>Third level</a:t>
+            </a:r>
+          </a:p>
+          <a:p>
+            <a:pPr lvl="3"/>
+            <a:r>
+              <a:rPr lang="en-US"/>
+              <a:t>Fourth level</a:t>
+            </a:r>
+          </a:p>
+          <a:p>
+            <a:pPr lvl="4"/>
+            <a:r>
+              <a:rPr lang="en-US"/>
+              <a:t>Fifth level</a:t>
+            </a:r>
+          </a:p>
+        </p:txBody>
+      </p:sp>
+      <p:sp>
+        <p:nvSpPr>
+          <p:cNvPr id="5" name="Date Placeholder 4">
+            <a:extLst>
+              <a:ext uri="{FF2B5EF4-FFF2-40B4-BE49-F238E27FC236}">
+                <a16:creationId xmlns:a16="http://schemas.microsoft.com/office/drawing/2014/main" id="{1501FADA-AE3E-B30F-6353-BF0478CF0E39}"/>
+              </a:ext>
+            </a:extLst>
+          </p:cNvPr>
+          <p:cNvSpPr>
+            <a:spLocks noGrp="1"/>
+          </p:cNvSpPr>
+          <p:nvPr>
+            <p:ph type="dt" sz="half" idx="10"/>
+          </p:nvPr>
+        </p:nvSpPr>
+        <p:spPr/>
+        <p:txBody>
+          <a:bodyPr/>
+          <a:lstStyle/>
+          <a:p>
+            <a:fld id="{6383FAE1-13DE-4511-8C1B-C8AFB720664C}" type="datetimeFigureOut">
               <a:rPr lang="en-US" smtClean="0"/>
-              <a:t>Edit Master text styles</a:t>
-            </a:r>
-          </a:p>
-          <a:p>
-            <a:pPr lvl="1"/>
-            <a:r>
-              <a:rPr lang="en-US" smtClean="0"/>
-              <a:t>Second level</a:t>
-            </a:r>
-          </a:p>
-          <a:p>
-            <a:pPr lvl="2"/>
-            <a:r>
-              <a:rPr lang="en-US" smtClean="0"/>
-              <a:t>Third level</a:t>
-            </a:r>
-          </a:p>
-          <a:p>
-            <a:pPr lvl="3"/>
-            <a:r>
-              <a:rPr lang="en-US" smtClean="0"/>
-              <a:t>Fourth level</a:t>
-            </a:r>
-          </a:p>
-          <a:p>
-            <a:pPr lvl="4"/>
-            <a:r>
-              <a:rPr lang="en-US" smtClean="0"/>
-              <a:t>Fifth level</a:t>
-            </a:r>
-            <a:endParaRPr lang="en-US"/>
-          </a:p>
-        </p:txBody>
-      </p:sp>
-      <p:sp>
-        <p:nvSpPr>
-          <p:cNvPr id="5" name="Date Placeholder 4"/>
-          <p:cNvSpPr>
-            <a:spLocks noGrp="1"/>
-          </p:cNvSpPr>
-          <p:nvPr>
-            <p:ph type="dt" sz="half" idx="10"/>
-          </p:nvPr>
-        </p:nvSpPr>
-        <p:spPr/>
-        <p:txBody>
-          <a:bodyPr/>
-          <a:lstStyle/>
-          <a:p>
-            <a:fld id="{7F083F68-03B4-41A9-9EF5-87438ABC6FC7}" type="datetimeFigureOut">
-              <a:rPr lang="en-US" smtClean="0"/>
-              <a:t>5/29/2025</a:t>
+              <a:t>4/12/2026</a:t>
             </a:fld>
             <a:endParaRPr lang="en-US"/>
           </a:p>
@@ -1248,7 +1964,13 @@
       </p:sp>
       <p:sp>
         <p:nvSpPr>
-          <p:cNvPr id="6" name="Footer Placeholder 5"/>
+          <p:cNvPr id="6" name="Footer Placeholder 5">
+            <a:extLst>
+              <a:ext uri="{FF2B5EF4-FFF2-40B4-BE49-F238E27FC236}">
+                <a16:creationId xmlns:a16="http://schemas.microsoft.com/office/drawing/2014/main" id="{7F16B517-96D7-6416-0C24-B14942ADD41C}"/>
+              </a:ext>
+            </a:extLst>
+          </p:cNvPr>
           <p:cNvSpPr>
             <a:spLocks noGrp="1"/>
           </p:cNvSpPr>
@@ -1267,7 +1989,13 @@
       </p:sp>
       <p:sp>
         <p:nvSpPr>
-          <p:cNvPr id="7" name="Slide Number Placeholder 6"/>
+          <p:cNvPr id="7" name="Slide Number Placeholder 6">
+            <a:extLst>
+              <a:ext uri="{FF2B5EF4-FFF2-40B4-BE49-F238E27FC236}">
+                <a16:creationId xmlns:a16="http://schemas.microsoft.com/office/drawing/2014/main" id="{1546F179-BF2F-393A-1AA6-C893B7B9FA37}"/>
+              </a:ext>
+            </a:extLst>
+          </p:cNvPr>
           <p:cNvSpPr>
             <a:spLocks noGrp="1"/>
           </p:cNvSpPr>
@@ -1280,7 +2008,7 @@
           <a:bodyPr/>
           <a:lstStyle/>
           <a:p>
-            <a:fld id="{155C3AE7-3595-4F49-B06E-F09DD1E50683}" type="slidenum">
+            <a:fld id="{81BC7A09-79EE-44A0-8F92-750D7C83D871}" type="slidenum">
               <a:rPr lang="en-US" smtClean="0"/>
               <a:t>‹#›</a:t>
             </a:fld>
@@ -1291,7 +2019,7 @@
     </p:spTree>
     <p:extLst>
       <p:ext uri="{BB962C8B-B14F-4D97-AF65-F5344CB8AC3E}">
-        <p14:creationId xmlns:p14="http://schemas.microsoft.com/office/powerpoint/2010/main" val="3273046206"/>
+        <p14:creationId xmlns:p14="http://schemas.microsoft.com/office/powerpoint/2010/main" val="3925852381"/>
       </p:ext>
     </p:extLst>
   </p:cSld>
@@ -1320,7 +2048,13 @@
       </p:grpSpPr>
       <p:sp>
         <p:nvSpPr>
-          <p:cNvPr id="2" name="Title 1"/>
+          <p:cNvPr id="2" name="Title 1">
+            <a:extLst>
+              <a:ext uri="{FF2B5EF4-FFF2-40B4-BE49-F238E27FC236}">
+                <a16:creationId xmlns:a16="http://schemas.microsoft.com/office/drawing/2014/main" id="{B6950483-A0C8-BF5B-61DE-39BC6FF9C123}"/>
+              </a:ext>
+            </a:extLst>
+          </p:cNvPr>
           <p:cNvSpPr>
             <a:spLocks noGrp="1"/>
           </p:cNvSpPr>
@@ -1339,16 +2073,21 @@
           <a:lstStyle/>
           <a:p>
             <a:r>
-              <a:rPr lang="en-US" smtClean="0"/>
+              <a:rPr lang="en-US"/>
               <a:t>Click to edit Master title style</a:t>
             </a:r>
-            <a:endParaRPr lang="en-US"/>
-          </a:p>
-        </p:txBody>
-      </p:sp>
-      <p:sp>
-        <p:nvSpPr>
-          <p:cNvPr id="3" name="Text Placeholder 2"/>
+          </a:p>
+        </p:txBody>
+      </p:sp>
+      <p:sp>
+        <p:nvSpPr>
+          <p:cNvPr id="3" name="Text Placeholder 2">
+            <a:extLst>
+              <a:ext uri="{FF2B5EF4-FFF2-40B4-BE49-F238E27FC236}">
+                <a16:creationId xmlns:a16="http://schemas.microsoft.com/office/drawing/2014/main" id="{646DB55B-C040-F211-BC81-97628EA48448}"/>
+              </a:ext>
+            </a:extLst>
+          </p:cNvPr>
           <p:cNvSpPr>
             <a:spLocks noGrp="1"/>
           </p:cNvSpPr>
@@ -1405,15 +2144,21 @@
           <a:p>
             <a:pPr lvl="0"/>
             <a:r>
-              <a:rPr lang="en-US" smtClean="0"/>
-              <a:t>Edit Master text styles</a:t>
-            </a:r>
-          </a:p>
-        </p:txBody>
-      </p:sp>
-      <p:sp>
-        <p:nvSpPr>
-          <p:cNvPr id="4" name="Content Placeholder 3"/>
+              <a:rPr lang="en-US"/>
+              <a:t>Click to edit Master text styles</a:t>
+            </a:r>
+          </a:p>
+        </p:txBody>
+      </p:sp>
+      <p:sp>
+        <p:nvSpPr>
+          <p:cNvPr id="4" name="Content Placeholder 3">
+            <a:extLst>
+              <a:ext uri="{FF2B5EF4-FFF2-40B4-BE49-F238E27FC236}">
+                <a16:creationId xmlns:a16="http://schemas.microsoft.com/office/drawing/2014/main" id="{F593EEAE-1CB3-AAC8-5818-D61E389EF1E2}"/>
+              </a:ext>
+            </a:extLst>
+          </p:cNvPr>
           <p:cNvSpPr>
             <a:spLocks noGrp="1"/>
           </p:cNvSpPr>
@@ -1433,44 +2178,49 @@
           <a:p>
             <a:pPr lvl="0"/>
             <a:r>
-              <a:rPr lang="en-US" smtClean="0"/>
-              <a:t>Edit Master text styles</a:t>
+              <a:rPr lang="en-US"/>
+              <a:t>Click to edit Master text styles</a:t>
             </a:r>
           </a:p>
           <a:p>
             <a:pPr lvl="1"/>
             <a:r>
-              <a:rPr lang="en-US" smtClean="0"/>
+              <a:rPr lang="en-US"/>
               <a:t>Second level</a:t>
             </a:r>
           </a:p>
           <a:p>
             <a:pPr lvl="2"/>
             <a:r>
-              <a:rPr lang="en-US" smtClean="0"/>
+              <a:rPr lang="en-US"/>
               <a:t>Third level</a:t>
             </a:r>
           </a:p>
           <a:p>
             <a:pPr lvl="3"/>
             <a:r>
-              <a:rPr lang="en-US" smtClean="0"/>
+              <a:rPr lang="en-US"/>
               <a:t>Fourth level</a:t>
             </a:r>
           </a:p>
           <a:p>
             <a:pPr lvl="4"/>
             <a:r>
-              <a:rPr lang="en-US" smtClean="0"/>
+              <a:rPr lang="en-US"/>
               <a:t>Fifth level</a:t>
             </a:r>
-            <a:endParaRPr lang="en-US"/>
-          </a:p>
-        </p:txBody>
-      </p:sp>
-      <p:sp>
-        <p:nvSpPr>
-          <p:cNvPr id="5" name="Text Placeholder 4"/>
+          </a:p>
+        </p:txBody>
+      </p:sp>
+      <p:sp>
+        <p:nvSpPr>
+          <p:cNvPr id="5" name="Text Placeholder 4">
+            <a:extLst>
+              <a:ext uri="{FF2B5EF4-FFF2-40B4-BE49-F238E27FC236}">
+                <a16:creationId xmlns:a16="http://schemas.microsoft.com/office/drawing/2014/main" id="{5ACE50F0-1141-D645-3892-2DA29633A371}"/>
+              </a:ext>
+            </a:extLst>
+          </p:cNvPr>
           <p:cNvSpPr>
             <a:spLocks noGrp="1"/>
           </p:cNvSpPr>
@@ -1527,15 +2277,21 @@
           <a:p>
             <a:pPr lvl="0"/>
             <a:r>
-              <a:rPr lang="en-US" smtClean="0"/>
-              <a:t>Edit Master text styles</a:t>
-            </a:r>
-          </a:p>
-        </p:txBody>
-      </p:sp>
-      <p:sp>
-        <p:nvSpPr>
-          <p:cNvPr id="6" name="Content Placeholder 5"/>
+              <a:rPr lang="en-US"/>
+              <a:t>Click to edit Master text styles</a:t>
+            </a:r>
+          </a:p>
+        </p:txBody>
+      </p:sp>
+      <p:sp>
+        <p:nvSpPr>
+          <p:cNvPr id="6" name="Content Placeholder 5">
+            <a:extLst>
+              <a:ext uri="{FF2B5EF4-FFF2-40B4-BE49-F238E27FC236}">
+                <a16:creationId xmlns:a16="http://schemas.microsoft.com/office/drawing/2014/main" id="{532E976C-52C7-C22D-28F7-B21E295185E1}"/>
+              </a:ext>
+            </a:extLst>
+          </p:cNvPr>
           <p:cNvSpPr>
             <a:spLocks noGrp="1"/>
           </p:cNvSpPr>
@@ -1555,59 +2311,64 @@
           <a:p>
             <a:pPr lvl="0"/>
             <a:r>
+              <a:rPr lang="en-US"/>
+              <a:t>Click to edit Master text styles</a:t>
+            </a:r>
+          </a:p>
+          <a:p>
+            <a:pPr lvl="1"/>
+            <a:r>
+              <a:rPr lang="en-US"/>
+              <a:t>Second level</a:t>
+            </a:r>
+          </a:p>
+          <a:p>
+            <a:pPr lvl="2"/>
+            <a:r>
+              <a:rPr lang="en-US"/>
+              <a:t>Third level</a:t>
+            </a:r>
+          </a:p>
+          <a:p>
+            <a:pPr lvl="3"/>
+            <a:r>
+              <a:rPr lang="en-US"/>
+              <a:t>Fourth level</a:t>
+            </a:r>
+          </a:p>
+          <a:p>
+            <a:pPr lvl="4"/>
+            <a:r>
+              <a:rPr lang="en-US"/>
+              <a:t>Fifth level</a:t>
+            </a:r>
+          </a:p>
+        </p:txBody>
+      </p:sp>
+      <p:sp>
+        <p:nvSpPr>
+          <p:cNvPr id="7" name="Date Placeholder 6">
+            <a:extLst>
+              <a:ext uri="{FF2B5EF4-FFF2-40B4-BE49-F238E27FC236}">
+                <a16:creationId xmlns:a16="http://schemas.microsoft.com/office/drawing/2014/main" id="{E797D00B-0B76-5C50-686B-A01396FCD6FA}"/>
+              </a:ext>
+            </a:extLst>
+          </p:cNvPr>
+          <p:cNvSpPr>
+            <a:spLocks noGrp="1"/>
+          </p:cNvSpPr>
+          <p:nvPr>
+            <p:ph type="dt" sz="half" idx="10"/>
+          </p:nvPr>
+        </p:nvSpPr>
+        <p:spPr/>
+        <p:txBody>
+          <a:bodyPr/>
+          <a:lstStyle/>
+          <a:p>
+            <a:fld id="{6383FAE1-13DE-4511-8C1B-C8AFB720664C}" type="datetimeFigureOut">
               <a:rPr lang="en-US" smtClean="0"/>
-              <a:t>Edit Master text styles</a:t>
-            </a:r>
-          </a:p>
-          <a:p>
-            <a:pPr lvl="1"/>
-            <a:r>
-              <a:rPr lang="en-US" smtClean="0"/>
-              <a:t>Second level</a:t>
-            </a:r>
-          </a:p>
-          <a:p>
-            <a:pPr lvl="2"/>
-            <a:r>
-              <a:rPr lang="en-US" smtClean="0"/>
-              <a:t>Third level</a:t>
-            </a:r>
-          </a:p>
-          <a:p>
-            <a:pPr lvl="3"/>
-            <a:r>
-              <a:rPr lang="en-US" smtClean="0"/>
-              <a:t>Fourth level</a:t>
-            </a:r>
-          </a:p>
-          <a:p>
-            <a:pPr lvl="4"/>
-            <a:r>
-              <a:rPr lang="en-US" smtClean="0"/>
-              <a:t>Fifth level</a:t>
-            </a:r>
-            <a:endParaRPr lang="en-US"/>
-          </a:p>
-        </p:txBody>
-      </p:sp>
-      <p:sp>
-        <p:nvSpPr>
-          <p:cNvPr id="7" name="Date Placeholder 6"/>
-          <p:cNvSpPr>
-            <a:spLocks noGrp="1"/>
-          </p:cNvSpPr>
-          <p:nvPr>
-            <p:ph type="dt" sz="half" idx="10"/>
-          </p:nvPr>
-        </p:nvSpPr>
-        <p:spPr/>
-        <p:txBody>
-          <a:bodyPr/>
-          <a:lstStyle/>
-          <a:p>
-            <a:fld id="{7F083F68-03B4-41A9-9EF5-87438ABC6FC7}" type="datetimeFigureOut">
-              <a:rPr lang="en-US" smtClean="0"/>
-              <a:t>5/29/2025</a:t>
+              <a:t>4/12/2026</a:t>
             </a:fld>
             <a:endParaRPr lang="en-US"/>
           </a:p>
@@ -1615,7 +2376,13 @@
       </p:sp>
       <p:sp>
         <p:nvSpPr>
-          <p:cNvPr id="8" name="Footer Placeholder 7"/>
+          <p:cNvPr id="8" name="Footer Placeholder 7">
+            <a:extLst>
+              <a:ext uri="{FF2B5EF4-FFF2-40B4-BE49-F238E27FC236}">
+                <a16:creationId xmlns:a16="http://schemas.microsoft.com/office/drawing/2014/main" id="{7B842B8D-3B74-4B67-9462-6D2C7ED9ADCB}"/>
+              </a:ext>
+            </a:extLst>
+          </p:cNvPr>
           <p:cNvSpPr>
             <a:spLocks noGrp="1"/>
           </p:cNvSpPr>
@@ -1634,7 +2401,13 @@
       </p:sp>
       <p:sp>
         <p:nvSpPr>
-          <p:cNvPr id="9" name="Slide Number Placeholder 8"/>
+          <p:cNvPr id="9" name="Slide Number Placeholder 8">
+            <a:extLst>
+              <a:ext uri="{FF2B5EF4-FFF2-40B4-BE49-F238E27FC236}">
+                <a16:creationId xmlns:a16="http://schemas.microsoft.com/office/drawing/2014/main" id="{F992D4BE-CE8C-0250-FE7D-1F370E25FE27}"/>
+              </a:ext>
+            </a:extLst>
+          </p:cNvPr>
           <p:cNvSpPr>
             <a:spLocks noGrp="1"/>
           </p:cNvSpPr>
@@ -1647,7 +2420,7 @@
           <a:bodyPr/>
           <a:lstStyle/>
           <a:p>
-            <a:fld id="{155C3AE7-3595-4F49-B06E-F09DD1E50683}" type="slidenum">
+            <a:fld id="{81BC7A09-79EE-44A0-8F92-750D7C83D871}" type="slidenum">
               <a:rPr lang="en-US" smtClean="0"/>
               <a:t>‹#›</a:t>
             </a:fld>
@@ -1658,7 +2431,7 @@
     </p:spTree>
     <p:extLst>
       <p:ext uri="{BB962C8B-B14F-4D97-AF65-F5344CB8AC3E}">
-        <p14:creationId xmlns:p14="http://schemas.microsoft.com/office/powerpoint/2010/main" val="1264349911"/>
+        <p14:creationId xmlns:p14="http://schemas.microsoft.com/office/powerpoint/2010/main" val="3765750289"/>
       </p:ext>
     </p:extLst>
   </p:cSld>
@@ -1687,7 +2460,13 @@
       </p:grpSpPr>
       <p:sp>
         <p:nvSpPr>
-          <p:cNvPr id="2" name="Title 1"/>
+          <p:cNvPr id="2" name="Title 1">
+            <a:extLst>
+              <a:ext uri="{FF2B5EF4-FFF2-40B4-BE49-F238E27FC236}">
+                <a16:creationId xmlns:a16="http://schemas.microsoft.com/office/drawing/2014/main" id="{CBCDBE28-2732-66A2-163C-433854615E7C}"/>
+              </a:ext>
+            </a:extLst>
+          </p:cNvPr>
           <p:cNvSpPr>
             <a:spLocks noGrp="1"/>
           </p:cNvSpPr>
@@ -1701,31 +2480,36 @@
           <a:lstStyle/>
           <a:p>
             <a:r>
+              <a:rPr lang="en-US"/>
+              <a:t>Click to edit Master title style</a:t>
+            </a:r>
+          </a:p>
+        </p:txBody>
+      </p:sp>
+      <p:sp>
+        <p:nvSpPr>
+          <p:cNvPr id="3" name="Date Placeholder 2">
+            <a:extLst>
+              <a:ext uri="{FF2B5EF4-FFF2-40B4-BE49-F238E27FC236}">
+                <a16:creationId xmlns:a16="http://schemas.microsoft.com/office/drawing/2014/main" id="{E270F3D6-B4BC-015F-96FA-1720B040CC96}"/>
+              </a:ext>
+            </a:extLst>
+          </p:cNvPr>
+          <p:cNvSpPr>
+            <a:spLocks noGrp="1"/>
+          </p:cNvSpPr>
+          <p:nvPr>
+            <p:ph type="dt" sz="half" idx="10"/>
+          </p:nvPr>
+        </p:nvSpPr>
+        <p:spPr/>
+        <p:txBody>
+          <a:bodyPr/>
+          <a:lstStyle/>
+          <a:p>
+            <a:fld id="{6383FAE1-13DE-4511-8C1B-C8AFB720664C}" type="datetimeFigureOut">
               <a:rPr lang="en-US" smtClean="0"/>
-              <a:t>Click to edit Master title style</a:t>
-            </a:r>
-            <a:endParaRPr lang="en-US"/>
-          </a:p>
-        </p:txBody>
-      </p:sp>
-      <p:sp>
-        <p:nvSpPr>
-          <p:cNvPr id="3" name="Date Placeholder 2"/>
-          <p:cNvSpPr>
-            <a:spLocks noGrp="1"/>
-          </p:cNvSpPr>
-          <p:nvPr>
-            <p:ph type="dt" sz="half" idx="10"/>
-          </p:nvPr>
-        </p:nvSpPr>
-        <p:spPr/>
-        <p:txBody>
-          <a:bodyPr/>
-          <a:lstStyle/>
-          <a:p>
-            <a:fld id="{7F083F68-03B4-41A9-9EF5-87438ABC6FC7}" type="datetimeFigureOut">
-              <a:rPr lang="en-US" smtClean="0"/>
-              <a:t>5/29/2025</a:t>
+              <a:t>4/12/2026</a:t>
             </a:fld>
             <a:endParaRPr lang="en-US"/>
           </a:p>
@@ -1733,7 +2517,13 @@
       </p:sp>
       <p:sp>
         <p:nvSpPr>
-          <p:cNvPr id="4" name="Footer Placeholder 3"/>
+          <p:cNvPr id="4" name="Footer Placeholder 3">
+            <a:extLst>
+              <a:ext uri="{FF2B5EF4-FFF2-40B4-BE49-F238E27FC236}">
+                <a16:creationId xmlns:a16="http://schemas.microsoft.com/office/drawing/2014/main" id="{21168A87-13A5-0A5A-4D74-C75E27775575}"/>
+              </a:ext>
+            </a:extLst>
+          </p:cNvPr>
           <p:cNvSpPr>
             <a:spLocks noGrp="1"/>
           </p:cNvSpPr>
@@ -1752,7 +2542,13 @@
       </p:sp>
       <p:sp>
         <p:nvSpPr>
-          <p:cNvPr id="5" name="Slide Number Placeholder 4"/>
+          <p:cNvPr id="5" name="Slide Number Placeholder 4">
+            <a:extLst>
+              <a:ext uri="{FF2B5EF4-FFF2-40B4-BE49-F238E27FC236}">
+                <a16:creationId xmlns:a16="http://schemas.microsoft.com/office/drawing/2014/main" id="{ADD6D7CB-BD93-54BE-CB47-7FBA06B18442}"/>
+              </a:ext>
+            </a:extLst>
+          </p:cNvPr>
           <p:cNvSpPr>
             <a:spLocks noGrp="1"/>
           </p:cNvSpPr>
@@ -1765,7 +2561,7 @@
           <a:bodyPr/>
           <a:lstStyle/>
           <a:p>
-            <a:fld id="{155C3AE7-3595-4F49-B06E-F09DD1E50683}" type="slidenum">
+            <a:fld id="{81BC7A09-79EE-44A0-8F92-750D7C83D871}" type="slidenum">
               <a:rPr lang="en-US" smtClean="0"/>
               <a:t>‹#›</a:t>
             </a:fld>
@@ -1776,7 +2572,7 @@
     </p:spTree>
     <p:extLst>
       <p:ext uri="{BB962C8B-B14F-4D97-AF65-F5344CB8AC3E}">
-        <p14:creationId xmlns:p14="http://schemas.microsoft.com/office/powerpoint/2010/main" val="4091484389"/>
+        <p14:creationId xmlns:p14="http://schemas.microsoft.com/office/powerpoint/2010/main" val="734650834"/>
       </p:ext>
     </p:extLst>
   </p:cSld>
@@ -1805,7 +2601,13 @@
       </p:grpSpPr>
       <p:sp>
         <p:nvSpPr>
-          <p:cNvPr id="2" name="Date Placeholder 1"/>
+          <p:cNvPr id="2" name="Date Placeholder 1">
+            <a:extLst>
+              <a:ext uri="{FF2B5EF4-FFF2-40B4-BE49-F238E27FC236}">
+                <a16:creationId xmlns:a16="http://schemas.microsoft.com/office/drawing/2014/main" id="{49B4114B-4550-9F52-0EF5-D1E9CF2FD384}"/>
+              </a:ext>
+            </a:extLst>
+          </p:cNvPr>
           <p:cNvSpPr>
             <a:spLocks noGrp="1"/>
           </p:cNvSpPr>
@@ -1818,9 +2620,9 @@
           <a:bodyPr/>
           <a:lstStyle/>
           <a:p>
-            <a:fld id="{7F083F68-03B4-41A9-9EF5-87438ABC6FC7}" type="datetimeFigureOut">
+            <a:fld id="{6383FAE1-13DE-4511-8C1B-C8AFB720664C}" type="datetimeFigureOut">
               <a:rPr lang="en-US" smtClean="0"/>
-              <a:t>5/29/2025</a:t>
+              <a:t>4/12/2026</a:t>
             </a:fld>
             <a:endParaRPr lang="en-US"/>
           </a:p>
@@ -1828,7 +2630,13 @@
       </p:sp>
       <p:sp>
         <p:nvSpPr>
-          <p:cNvPr id="3" name="Footer Placeholder 2"/>
+          <p:cNvPr id="3" name="Footer Placeholder 2">
+            <a:extLst>
+              <a:ext uri="{FF2B5EF4-FFF2-40B4-BE49-F238E27FC236}">
+                <a16:creationId xmlns:a16="http://schemas.microsoft.com/office/drawing/2014/main" id="{0BF3136E-0C79-F4F5-F24E-D5FF71CDB55C}"/>
+              </a:ext>
+            </a:extLst>
+          </p:cNvPr>
           <p:cNvSpPr>
             <a:spLocks noGrp="1"/>
           </p:cNvSpPr>
@@ -1847,7 +2655,13 @@
       </p:sp>
       <p:sp>
         <p:nvSpPr>
-          <p:cNvPr id="4" name="Slide Number Placeholder 3"/>
+          <p:cNvPr id="4" name="Slide Number Placeholder 3">
+            <a:extLst>
+              <a:ext uri="{FF2B5EF4-FFF2-40B4-BE49-F238E27FC236}">
+                <a16:creationId xmlns:a16="http://schemas.microsoft.com/office/drawing/2014/main" id="{9F2E2157-F670-A339-0CB7-7399568D5A1C}"/>
+              </a:ext>
+            </a:extLst>
+          </p:cNvPr>
           <p:cNvSpPr>
             <a:spLocks noGrp="1"/>
           </p:cNvSpPr>
@@ -1860,7 +2674,7 @@
           <a:bodyPr/>
           <a:lstStyle/>
           <a:p>
-            <a:fld id="{155C3AE7-3595-4F49-B06E-F09DD1E50683}" type="slidenum">
+            <a:fld id="{81BC7A09-79EE-44A0-8F92-750D7C83D871}" type="slidenum">
               <a:rPr lang="en-US" smtClean="0"/>
               <a:t>‹#›</a:t>
             </a:fld>
@@ -1871,7 +2685,7 @@
     </p:spTree>
     <p:extLst>
       <p:ext uri="{BB962C8B-B14F-4D97-AF65-F5344CB8AC3E}">
-        <p14:creationId xmlns:p14="http://schemas.microsoft.com/office/powerpoint/2010/main" val="4052212923"/>
+        <p14:creationId xmlns:p14="http://schemas.microsoft.com/office/powerpoint/2010/main" val="3796501475"/>
       </p:ext>
     </p:extLst>
   </p:cSld>
@@ -1900,7 +2714,13 @@
       </p:grpSpPr>
       <p:sp>
         <p:nvSpPr>
-          <p:cNvPr id="2" name="Title 1"/>
+          <p:cNvPr id="2" name="Title 1">
+            <a:extLst>
+              <a:ext uri="{FF2B5EF4-FFF2-40B4-BE49-F238E27FC236}">
+                <a16:creationId xmlns:a16="http://schemas.microsoft.com/office/drawing/2014/main" id="{A5802A98-8738-1E16-A16E-D8858EEA762D}"/>
+              </a:ext>
+            </a:extLst>
+          </p:cNvPr>
           <p:cNvSpPr>
             <a:spLocks noGrp="1"/>
           </p:cNvSpPr>
@@ -1923,16 +2743,21 @@
           </a:lstStyle>
           <a:p>
             <a:r>
-              <a:rPr lang="en-US" smtClean="0"/>
+              <a:rPr lang="en-US"/>
               <a:t>Click to edit Master title style</a:t>
             </a:r>
-            <a:endParaRPr lang="en-US"/>
-          </a:p>
-        </p:txBody>
-      </p:sp>
-      <p:sp>
-        <p:nvSpPr>
-          <p:cNvPr id="3" name="Content Placeholder 2"/>
+          </a:p>
+        </p:txBody>
+      </p:sp>
+      <p:sp>
+        <p:nvSpPr>
+          <p:cNvPr id="3" name="Content Placeholder 2">
+            <a:extLst>
+              <a:ext uri="{FF2B5EF4-FFF2-40B4-BE49-F238E27FC236}">
+                <a16:creationId xmlns:a16="http://schemas.microsoft.com/office/drawing/2014/main" id="{64FC67E5-1169-257D-D9E7-C7B952C21372}"/>
+              </a:ext>
+            </a:extLst>
+          </p:cNvPr>
           <p:cNvSpPr>
             <a:spLocks noGrp="1"/>
           </p:cNvSpPr>
@@ -1980,44 +2805,49 @@
           <a:p>
             <a:pPr lvl="0"/>
             <a:r>
-              <a:rPr lang="en-US" smtClean="0"/>
-              <a:t>Edit Master text styles</a:t>
+              <a:rPr lang="en-US"/>
+              <a:t>Click to edit Master text styles</a:t>
             </a:r>
           </a:p>
           <a:p>
             <a:pPr lvl="1"/>
             <a:r>
-              <a:rPr lang="en-US" smtClean="0"/>
+              <a:rPr lang="en-US"/>
               <a:t>Second level</a:t>
             </a:r>
           </a:p>
           <a:p>
             <a:pPr lvl="2"/>
             <a:r>
-              <a:rPr lang="en-US" smtClean="0"/>
+              <a:rPr lang="en-US"/>
               <a:t>Third level</a:t>
             </a:r>
           </a:p>
           <a:p>
             <a:pPr lvl="3"/>
             <a:r>
-              <a:rPr lang="en-US" smtClean="0"/>
+              <a:rPr lang="en-US"/>
               <a:t>Fourth level</a:t>
             </a:r>
           </a:p>
           <a:p>
             <a:pPr lvl="4"/>
             <a:r>
-              <a:rPr lang="en-US" smtClean="0"/>
+              <a:rPr lang="en-US"/>
               <a:t>Fifth level</a:t>
             </a:r>
-            <a:endParaRPr lang="en-US"/>
-          </a:p>
-        </p:txBody>
-      </p:sp>
-      <p:sp>
-        <p:nvSpPr>
-          <p:cNvPr id="4" name="Text Placeholder 3"/>
+          </a:p>
+        </p:txBody>
+      </p:sp>
+      <p:sp>
+        <p:nvSpPr>
+          <p:cNvPr id="4" name="Text Placeholder 3">
+            <a:extLst>
+              <a:ext uri="{FF2B5EF4-FFF2-40B4-BE49-F238E27FC236}">
+                <a16:creationId xmlns:a16="http://schemas.microsoft.com/office/drawing/2014/main" id="{90B2CF6C-0F85-566A-86BC-CBFEB17E755D}"/>
+              </a:ext>
+            </a:extLst>
+          </p:cNvPr>
           <p:cNvSpPr>
             <a:spLocks noGrp="1"/>
           </p:cNvSpPr>
@@ -2074,30 +2904,36 @@
           <a:p>
             <a:pPr lvl="0"/>
             <a:r>
+              <a:rPr lang="en-US"/>
+              <a:t>Click to edit Master text styles</a:t>
+            </a:r>
+          </a:p>
+        </p:txBody>
+      </p:sp>
+      <p:sp>
+        <p:nvSpPr>
+          <p:cNvPr id="5" name="Date Placeholder 4">
+            <a:extLst>
+              <a:ext uri="{FF2B5EF4-FFF2-40B4-BE49-F238E27FC236}">
+                <a16:creationId xmlns:a16="http://schemas.microsoft.com/office/drawing/2014/main" id="{1A64F0FC-ECB8-638F-A224-98FFA8270730}"/>
+              </a:ext>
+            </a:extLst>
+          </p:cNvPr>
+          <p:cNvSpPr>
+            <a:spLocks noGrp="1"/>
+          </p:cNvSpPr>
+          <p:nvPr>
+            <p:ph type="dt" sz="half" idx="10"/>
+          </p:nvPr>
+        </p:nvSpPr>
+        <p:spPr/>
+        <p:txBody>
+          <a:bodyPr/>
+          <a:lstStyle/>
+          <a:p>
+            <a:fld id="{6383FAE1-13DE-4511-8C1B-C8AFB720664C}" type="datetimeFigureOut">
               <a:rPr lang="en-US" smtClean="0"/>
-              <a:t>Edit Master text styles</a:t>
-            </a:r>
-          </a:p>
-        </p:txBody>
-      </p:sp>
-      <p:sp>
-        <p:nvSpPr>
-          <p:cNvPr id="5" name="Date Placeholder 4"/>
-          <p:cNvSpPr>
-            <a:spLocks noGrp="1"/>
-          </p:cNvSpPr>
-          <p:nvPr>
-            <p:ph type="dt" sz="half" idx="10"/>
-          </p:nvPr>
-        </p:nvSpPr>
-        <p:spPr/>
-        <p:txBody>
-          <a:bodyPr/>
-          <a:lstStyle/>
-          <a:p>
-            <a:fld id="{7F083F68-03B4-41A9-9EF5-87438ABC6FC7}" type="datetimeFigureOut">
-              <a:rPr lang="en-US" smtClean="0"/>
-              <a:t>5/29/2025</a:t>
+              <a:t>4/12/2026</a:t>
             </a:fld>
             <a:endParaRPr lang="en-US"/>
           </a:p>
@@ -2105,7 +2941,13 @@
       </p:sp>
       <p:sp>
         <p:nvSpPr>
-          <p:cNvPr id="6" name="Footer Placeholder 5"/>
+          <p:cNvPr id="6" name="Footer Placeholder 5">
+            <a:extLst>
+              <a:ext uri="{FF2B5EF4-FFF2-40B4-BE49-F238E27FC236}">
+                <a16:creationId xmlns:a16="http://schemas.microsoft.com/office/drawing/2014/main" id="{A8095B89-4DC8-435E-3545-6187AD3E00A8}"/>
+              </a:ext>
+            </a:extLst>
+          </p:cNvPr>
           <p:cNvSpPr>
             <a:spLocks noGrp="1"/>
           </p:cNvSpPr>
@@ -2124,7 +2966,13 @@
       </p:sp>
       <p:sp>
         <p:nvSpPr>
-          <p:cNvPr id="7" name="Slide Number Placeholder 6"/>
+          <p:cNvPr id="7" name="Slide Number Placeholder 6">
+            <a:extLst>
+              <a:ext uri="{FF2B5EF4-FFF2-40B4-BE49-F238E27FC236}">
+                <a16:creationId xmlns:a16="http://schemas.microsoft.com/office/drawing/2014/main" id="{171B68CF-9592-FB7C-B517-0CC962C8B6DC}"/>
+              </a:ext>
+            </a:extLst>
+          </p:cNvPr>
           <p:cNvSpPr>
             <a:spLocks noGrp="1"/>
           </p:cNvSpPr>
@@ -2137,7 +2985,7 @@
           <a:bodyPr/>
           <a:lstStyle/>
           <a:p>
-            <a:fld id="{155C3AE7-3595-4F49-B06E-F09DD1E50683}" type="slidenum">
+            <a:fld id="{81BC7A09-79EE-44A0-8F92-750D7C83D871}" type="slidenum">
               <a:rPr lang="en-US" smtClean="0"/>
               <a:t>‹#›</a:t>
             </a:fld>
@@ -2148,7 +2996,7 @@
     </p:spTree>
     <p:extLst>
       <p:ext uri="{BB962C8B-B14F-4D97-AF65-F5344CB8AC3E}">
-        <p14:creationId xmlns:p14="http://schemas.microsoft.com/office/powerpoint/2010/main" val="3161861484"/>
+        <p14:creationId xmlns:p14="http://schemas.microsoft.com/office/powerpoint/2010/main" val="2644300723"/>
       </p:ext>
     </p:extLst>
   </p:cSld>
@@ -2177,7 +3025,13 @@
       </p:grpSpPr>
       <p:sp>
         <p:nvSpPr>
-          <p:cNvPr id="2" name="Title 1"/>
+          <p:cNvPr id="2" name="Title 1">
+            <a:extLst>
+              <a:ext uri="{FF2B5EF4-FFF2-40B4-BE49-F238E27FC236}">
+                <a16:creationId xmlns:a16="http://schemas.microsoft.com/office/drawing/2014/main" id="{853E2BC2-F728-2BA5-C848-31FA3458ADF0}"/>
+              </a:ext>
+            </a:extLst>
+          </p:cNvPr>
           <p:cNvSpPr>
             <a:spLocks noGrp="1"/>
           </p:cNvSpPr>
@@ -2200,16 +3054,21 @@
           </a:lstStyle>
           <a:p>
             <a:r>
-              <a:rPr lang="en-US" smtClean="0"/>
+              <a:rPr lang="en-US"/>
               <a:t>Click to edit Master title style</a:t>
             </a:r>
-            <a:endParaRPr lang="en-US"/>
-          </a:p>
-        </p:txBody>
-      </p:sp>
-      <p:sp>
-        <p:nvSpPr>
-          <p:cNvPr id="3" name="Picture Placeholder 2"/>
+          </a:p>
+        </p:txBody>
+      </p:sp>
+      <p:sp>
+        <p:nvSpPr>
+          <p:cNvPr id="3" name="Picture Placeholder 2">
+            <a:extLst>
+              <a:ext uri="{FF2B5EF4-FFF2-40B4-BE49-F238E27FC236}">
+                <a16:creationId xmlns:a16="http://schemas.microsoft.com/office/drawing/2014/main" id="{B957B909-12C3-703B-57E9-008076312F68}"/>
+              </a:ext>
+            </a:extLst>
+          </p:cNvPr>
           <p:cNvSpPr>
             <a:spLocks noGrp="1"/>
           </p:cNvSpPr>
@@ -2264,13 +3123,22 @@
             </a:lvl9pPr>
           </a:lstStyle>
           <a:p>
-            <a:endParaRPr lang="en-US"/>
-          </a:p>
-        </p:txBody>
-      </p:sp>
-      <p:sp>
-        <p:nvSpPr>
-          <p:cNvPr id="4" name="Text Placeholder 3"/>
+            <a:r>
+              <a:rPr lang="en-US"/>
+              <a:t>Click icon to add picture</a:t>
+            </a:r>
+          </a:p>
+        </p:txBody>
+      </p:sp>
+      <p:sp>
+        <p:nvSpPr>
+          <p:cNvPr id="4" name="Text Placeholder 3">
+            <a:extLst>
+              <a:ext uri="{FF2B5EF4-FFF2-40B4-BE49-F238E27FC236}">
+                <a16:creationId xmlns:a16="http://schemas.microsoft.com/office/drawing/2014/main" id="{FDAE4D7A-BC41-33D0-D36D-08BB5C2C594A}"/>
+              </a:ext>
+            </a:extLst>
+          </p:cNvPr>
           <p:cNvSpPr>
             <a:spLocks noGrp="1"/>
           </p:cNvSpPr>
@@ -2327,30 +3195,36 @@
           <a:p>
             <a:pPr lvl="0"/>
             <a:r>
+              <a:rPr lang="en-US"/>
+              <a:t>Click to edit Master text styles</a:t>
+            </a:r>
+          </a:p>
+        </p:txBody>
+      </p:sp>
+      <p:sp>
+        <p:nvSpPr>
+          <p:cNvPr id="5" name="Date Placeholder 4">
+            <a:extLst>
+              <a:ext uri="{FF2B5EF4-FFF2-40B4-BE49-F238E27FC236}">
+                <a16:creationId xmlns:a16="http://schemas.microsoft.com/office/drawing/2014/main" id="{FB17FB83-437D-9293-0B99-2DC89A047DD5}"/>
+              </a:ext>
+            </a:extLst>
+          </p:cNvPr>
+          <p:cNvSpPr>
+            <a:spLocks noGrp="1"/>
+          </p:cNvSpPr>
+          <p:nvPr>
+            <p:ph type="dt" sz="half" idx="10"/>
+          </p:nvPr>
+        </p:nvSpPr>
+        <p:spPr/>
+        <p:txBody>
+          <a:bodyPr/>
+          <a:lstStyle/>
+          <a:p>
+            <a:fld id="{6383FAE1-13DE-4511-8C1B-C8AFB720664C}" type="datetimeFigureOut">
               <a:rPr lang="en-US" smtClean="0"/>
-              <a:t>Edit Master text styles</a:t>
-            </a:r>
-          </a:p>
-        </p:txBody>
-      </p:sp>
-      <p:sp>
-        <p:nvSpPr>
-          <p:cNvPr id="5" name="Date Placeholder 4"/>
-          <p:cNvSpPr>
-            <a:spLocks noGrp="1"/>
-          </p:cNvSpPr>
-          <p:nvPr>
-            <p:ph type="dt" sz="half" idx="10"/>
-          </p:nvPr>
-        </p:nvSpPr>
-        <p:spPr/>
-        <p:txBody>
-          <a:bodyPr/>
-          <a:lstStyle/>
-          <a:p>
-            <a:fld id="{7F083F68-03B4-41A9-9EF5-87438ABC6FC7}" type="datetimeFigureOut">
-              <a:rPr lang="en-US" smtClean="0"/>
-              <a:t>5/29/2025</a:t>
+              <a:t>4/12/2026</a:t>
             </a:fld>
             <a:endParaRPr lang="en-US"/>
           </a:p>
@@ -2358,7 +3232,13 @@
       </p:sp>
       <p:sp>
         <p:nvSpPr>
-          <p:cNvPr id="6" name="Footer Placeholder 5"/>
+          <p:cNvPr id="6" name="Footer Placeholder 5">
+            <a:extLst>
+              <a:ext uri="{FF2B5EF4-FFF2-40B4-BE49-F238E27FC236}">
+                <a16:creationId xmlns:a16="http://schemas.microsoft.com/office/drawing/2014/main" id="{1EDF5674-4DC1-3171-8FEB-C280686D413B}"/>
+              </a:ext>
+            </a:extLst>
+          </p:cNvPr>
           <p:cNvSpPr>
             <a:spLocks noGrp="1"/>
           </p:cNvSpPr>
@@ -2377,7 +3257,13 @@
       </p:sp>
       <p:sp>
         <p:nvSpPr>
-          <p:cNvPr id="7" name="Slide Number Placeholder 6"/>
+          <p:cNvPr id="7" name="Slide Number Placeholder 6">
+            <a:extLst>
+              <a:ext uri="{FF2B5EF4-FFF2-40B4-BE49-F238E27FC236}">
+                <a16:creationId xmlns:a16="http://schemas.microsoft.com/office/drawing/2014/main" id="{FDD431F6-5490-78BA-7028-0BD08BF1A0FA}"/>
+              </a:ext>
+            </a:extLst>
+          </p:cNvPr>
           <p:cNvSpPr>
             <a:spLocks noGrp="1"/>
           </p:cNvSpPr>
@@ -2390,7 +3276,7 @@
           <a:bodyPr/>
           <a:lstStyle/>
           <a:p>
-            <a:fld id="{155C3AE7-3595-4F49-B06E-F09DD1E50683}" type="slidenum">
+            <a:fld id="{81BC7A09-79EE-44A0-8F92-750D7C83D871}" type="slidenum">
               <a:rPr lang="en-US" smtClean="0"/>
               <a:t>‹#›</a:t>
             </a:fld>
@@ -2401,7 +3287,7 @@
     </p:spTree>
     <p:extLst>
       <p:ext uri="{BB962C8B-B14F-4D97-AF65-F5344CB8AC3E}">
-        <p14:creationId xmlns:p14="http://schemas.microsoft.com/office/powerpoint/2010/main" val="3177187800"/>
+        <p14:creationId xmlns:p14="http://schemas.microsoft.com/office/powerpoint/2010/main" val="2380860319"/>
       </p:ext>
     </p:extLst>
   </p:cSld>
@@ -2415,9 +3301,12 @@
 <p:sldMaster xmlns:a="http://schemas.openxmlformats.org/drawingml/2006/main" xmlns:r="http://schemas.openxmlformats.org/officeDocument/2006/relationships" xmlns:p="http://schemas.openxmlformats.org/presentationml/2006/main">
   <p:cSld>
     <p:bg>
-      <p:bgRef idx="1001">
-        <a:schemeClr val="bg1"/>
-      </p:bgRef>
+      <p:bgPr>
+        <a:solidFill>
+          <a:schemeClr val="tx1"/>
+        </a:solidFill>
+        <a:effectLst/>
+      </p:bgPr>
     </p:bg>
     <p:spTree>
       <p:nvGrpSpPr>
@@ -2435,7 +3324,13 @@
       </p:grpSpPr>
       <p:sp>
         <p:nvSpPr>
-          <p:cNvPr id="2" name="Title Placeholder 1"/>
+          <p:cNvPr id="2" name="Title Placeholder 1">
+            <a:extLst>
+              <a:ext uri="{FF2B5EF4-FFF2-40B4-BE49-F238E27FC236}">
+                <a16:creationId xmlns:a16="http://schemas.microsoft.com/office/drawing/2014/main" id="{73CEE1C2-DF65-6CAD-D1EF-224508404395}"/>
+              </a:ext>
+            </a:extLst>
+          </p:cNvPr>
           <p:cNvSpPr>
             <a:spLocks noGrp="1"/>
           </p:cNvSpPr>
@@ -2459,16 +3354,21 @@
           <a:lstStyle/>
           <a:p>
             <a:r>
-              <a:rPr lang="en-US" smtClean="0"/>
+              <a:rPr lang="en-US" dirty="0"/>
               <a:t>Click to edit Master title style</a:t>
             </a:r>
-            <a:endParaRPr lang="en-US"/>
-          </a:p>
-        </p:txBody>
-      </p:sp>
-      <p:sp>
-        <p:nvSpPr>
-          <p:cNvPr id="3" name="Text Placeholder 2"/>
+          </a:p>
+        </p:txBody>
+      </p:sp>
+      <p:sp>
+        <p:nvSpPr>
+          <p:cNvPr id="3" name="Text Placeholder 2">
+            <a:extLst>
+              <a:ext uri="{FF2B5EF4-FFF2-40B4-BE49-F238E27FC236}">
+                <a16:creationId xmlns:a16="http://schemas.microsoft.com/office/drawing/2014/main" id="{46AFB6A6-8766-C849-1846-0F387502412C}"/>
+              </a:ext>
+            </a:extLst>
+          </p:cNvPr>
           <p:cNvSpPr>
             <a:spLocks noGrp="1"/>
           </p:cNvSpPr>
@@ -2493,44 +3393,49 @@
           <a:p>
             <a:pPr lvl="0"/>
             <a:r>
-              <a:rPr lang="en-US" smtClean="0"/>
-              <a:t>Edit Master text styles</a:t>
+              <a:rPr lang="en-US" dirty="0"/>
+              <a:t>Click to edit Master text styles</a:t>
             </a:r>
           </a:p>
           <a:p>
             <a:pPr lvl="1"/>
             <a:r>
-              <a:rPr lang="en-US" smtClean="0"/>
+              <a:rPr lang="en-US" dirty="0"/>
               <a:t>Second level</a:t>
             </a:r>
           </a:p>
           <a:p>
             <a:pPr lvl="2"/>
             <a:r>
-              <a:rPr lang="en-US" smtClean="0"/>
+              <a:rPr lang="en-US" dirty="0"/>
               <a:t>Third level</a:t>
             </a:r>
           </a:p>
           <a:p>
             <a:pPr lvl="3"/>
             <a:r>
-              <a:rPr lang="en-US" smtClean="0"/>
+              <a:rPr lang="en-US" dirty="0"/>
               <a:t>Fourth level</a:t>
             </a:r>
           </a:p>
           <a:p>
             <a:pPr lvl="4"/>
             <a:r>
-              <a:rPr lang="en-US" smtClean="0"/>
+              <a:rPr lang="en-US" dirty="0"/>
               <a:t>Fifth level</a:t>
             </a:r>
-            <a:endParaRPr lang="en-US"/>
-          </a:p>
-        </p:txBody>
-      </p:sp>
-      <p:sp>
-        <p:nvSpPr>
-          <p:cNvPr id="4" name="Date Placeholder 3"/>
+          </a:p>
+        </p:txBody>
+      </p:sp>
+      <p:sp>
+        <p:nvSpPr>
+          <p:cNvPr id="4" name="Date Placeholder 3">
+            <a:extLst>
+              <a:ext uri="{FF2B5EF4-FFF2-40B4-BE49-F238E27FC236}">
+                <a16:creationId xmlns:a16="http://schemas.microsoft.com/office/drawing/2014/main" id="{CB55176B-E136-1615-D0B5-186783ACB8FF}"/>
+              </a:ext>
+            </a:extLst>
+          </p:cNvPr>
           <p:cNvSpPr>
             <a:spLocks noGrp="1"/>
           </p:cNvSpPr>
@@ -2561,9 +3466,9 @@
             </a:lvl1pPr>
           </a:lstStyle>
           <a:p>
-            <a:fld id="{7F083F68-03B4-41A9-9EF5-87438ABC6FC7}" type="datetimeFigureOut">
+            <a:fld id="{6383FAE1-13DE-4511-8C1B-C8AFB720664C}" type="datetimeFigureOut">
               <a:rPr lang="en-US" smtClean="0"/>
-              <a:t>5/29/2025</a:t>
+              <a:t>4/12/2026</a:t>
             </a:fld>
             <a:endParaRPr lang="en-US"/>
           </a:p>
@@ -2571,7 +3476,13 @@
       </p:sp>
       <p:sp>
         <p:nvSpPr>
-          <p:cNvPr id="5" name="Footer Placeholder 4"/>
+          <p:cNvPr id="5" name="Footer Placeholder 4">
+            <a:extLst>
+              <a:ext uri="{FF2B5EF4-FFF2-40B4-BE49-F238E27FC236}">
+                <a16:creationId xmlns:a16="http://schemas.microsoft.com/office/drawing/2014/main" id="{5E5AAAF6-4731-DB91-AB26-A07CEF1B9D24}"/>
+              </a:ext>
+            </a:extLst>
+          </p:cNvPr>
           <p:cNvSpPr>
             <a:spLocks noGrp="1"/>
           </p:cNvSpPr>
@@ -2608,7 +3519,13 @@
       </p:sp>
       <p:sp>
         <p:nvSpPr>
-          <p:cNvPr id="6" name="Slide Number Placeholder 5"/>
+          <p:cNvPr id="6" name="Slide Number Placeholder 5">
+            <a:extLst>
+              <a:ext uri="{FF2B5EF4-FFF2-40B4-BE49-F238E27FC236}">
+                <a16:creationId xmlns:a16="http://schemas.microsoft.com/office/drawing/2014/main" id="{9814165E-BEE7-F086-BE90-50642610F091}"/>
+              </a:ext>
+            </a:extLst>
+          </p:cNvPr>
           <p:cNvSpPr>
             <a:spLocks noGrp="1"/>
           </p:cNvSpPr>
@@ -2639,7 +3556,7 @@
             </a:lvl1pPr>
           </a:lstStyle>
           <a:p>
-            <a:fld id="{155C3AE7-3595-4F49-B06E-F09DD1E50683}" type="slidenum">
+            <a:fld id="{81BC7A09-79EE-44A0-8F92-750D7C83D871}" type="slidenum">
               <a:rPr lang="en-US" smtClean="0"/>
               <a:t>‹#›</a:t>
             </a:fld>
@@ -2647,10 +3564,134 @@
           </a:p>
         </p:txBody>
       </p:sp>
+      <p:pic>
+        <p:nvPicPr>
+          <p:cNvPr id="8" name="Picture 7">
+            <a:extLst>
+              <a:ext uri="{FF2B5EF4-FFF2-40B4-BE49-F238E27FC236}">
+                <a16:creationId xmlns:a16="http://schemas.microsoft.com/office/drawing/2014/main" id="{9F3932AB-6107-98C9-CEDA-32A7DF597298}"/>
+              </a:ext>
+            </a:extLst>
+          </p:cNvPr>
+          <p:cNvPicPr>
+            <a:picLocks noChangeAspect="1"/>
+          </p:cNvPicPr>
+          <p:nvPr userDrawn="1"/>
+        </p:nvPicPr>
+        <p:blipFill>
+          <a:blip r:embed="rId13">
+            <a:alphaModFix amt="50000"/>
+            <a:extLst>
+              <a:ext uri="{28A0092B-C50C-407E-A947-70E740481C1C}">
+                <a14:useLocalDpi xmlns:a14="http://schemas.microsoft.com/office/drawing/2010/main" val="0"/>
+              </a:ext>
+            </a:extLst>
+          </a:blip>
+          <a:srcRect l="26008" t="39529" r="41606" b="46715"/>
+          <a:stretch>
+            <a:fillRect/>
+          </a:stretch>
+        </p:blipFill>
+        <p:spPr>
+          <a:xfrm>
+            <a:off x="212435" y="136524"/>
+            <a:ext cx="1330037" cy="1025209"/>
+          </a:xfrm>
+          <a:prstGeom prst="ellipse">
+            <a:avLst/>
+          </a:prstGeom>
+          <a:ln w="63500" cap="rnd">
+            <a:solidFill>
+              <a:srgbClr val="333333"/>
+            </a:solidFill>
+          </a:ln>
+          <a:effectLst>
+            <a:outerShdw blurRad="381000" dist="292100" dir="5400000" sx="-80000" sy="-18000" rotWithShape="0">
+              <a:srgbClr val="000000">
+                <a:alpha val="22000"/>
+              </a:srgbClr>
+            </a:outerShdw>
+          </a:effectLst>
+          <a:scene3d>
+            <a:camera prst="orthographicFront"/>
+            <a:lightRig rig="contrasting" dir="t">
+              <a:rot lat="0" lon="0" rev="3000000"/>
+            </a:lightRig>
+          </a:scene3d>
+          <a:sp3d contourW="7620">
+            <a:bevelT w="95250" h="31750"/>
+            <a:contourClr>
+              <a:srgbClr val="333333"/>
+            </a:contourClr>
+          </a:sp3d>
+        </p:spPr>
+      </p:pic>
+      <p:pic>
+        <p:nvPicPr>
+          <p:cNvPr id="7" name="Picture 6">
+            <a:extLst>
+              <a:ext uri="{FF2B5EF4-FFF2-40B4-BE49-F238E27FC236}">
+                <a16:creationId xmlns:a16="http://schemas.microsoft.com/office/drawing/2014/main" id="{2CA22C5A-FA6D-B699-950E-8D249A969331}"/>
+              </a:ext>
+            </a:extLst>
+          </p:cNvPr>
+          <p:cNvPicPr>
+            <a:picLocks noChangeAspect="1"/>
+          </p:cNvPicPr>
+          <p:nvPr userDrawn="1"/>
+        </p:nvPicPr>
+        <p:blipFill>
+          <a:blip r:embed="rId13">
+            <a:alphaModFix/>
+            <a:extLst>
+              <a:ext uri="{28A0092B-C50C-407E-A947-70E740481C1C}">
+                <a14:useLocalDpi xmlns:a14="http://schemas.microsoft.com/office/drawing/2010/main" val="0"/>
+              </a:ext>
+            </a:extLst>
+          </a:blip>
+          <a:srcRect l="26008" t="39529" r="41606" b="46715"/>
+          <a:stretch>
+            <a:fillRect/>
+          </a:stretch>
+        </p:blipFill>
+        <p:spPr>
+          <a:xfrm>
+            <a:off x="10855909" y="185738"/>
+            <a:ext cx="1123656" cy="866128"/>
+          </a:xfrm>
+          <a:prstGeom prst="ellipse">
+            <a:avLst/>
+          </a:prstGeom>
+          <a:ln w="63500" cap="rnd">
+            <a:solidFill>
+              <a:srgbClr val="333333"/>
+            </a:solidFill>
+          </a:ln>
+          <a:effectLst>
+            <a:outerShdw blurRad="381000" dist="292100" dir="5400000" sx="-80000" sy="-18000" rotWithShape="0">
+              <a:srgbClr val="000000">
+                <a:alpha val="22000"/>
+              </a:srgbClr>
+            </a:outerShdw>
+          </a:effectLst>
+          <a:scene3d>
+            <a:camera prst="orthographicFront"/>
+            <a:lightRig rig="contrasting" dir="t">
+              <a:rot lat="0" lon="0" rev="3000000"/>
+            </a:lightRig>
+          </a:scene3d>
+          <a:sp3d contourW="7620">
+            <a:bevelT w="95250" h="31750"/>
+            <a:contourClr>
+              <a:srgbClr val="333333"/>
+            </a:contourClr>
+          </a:sp3d>
+        </p:spPr>
+      </p:pic>
     </p:spTree>
     <p:extLst>
       <p:ext uri="{BB962C8B-B14F-4D97-AF65-F5344CB8AC3E}">
-        <p14:creationId xmlns:p14="http://schemas.microsoft.com/office/powerpoint/2010/main" val="640792365"/>
+        <p14:creationId xmlns:p14="http://schemas.microsoft.com/office/powerpoint/2010/main" val="1499973180"/>
       </p:ext>
     </p:extLst>
   </p:cSld>
@@ -2680,7 +3721,10 @@
         <a:buNone/>
         <a:defRPr sz="4400" kern="1200">
           <a:solidFill>
-            <a:schemeClr val="tx1"/>
+            <a:schemeClr val="accent6">
+              <a:lumMod val="60000"/>
+              <a:lumOff val="40000"/>
+            </a:schemeClr>
           </a:solidFill>
           <a:latin typeface="+mj-lt"/>
           <a:ea typeface="+mj-ea"/>
@@ -2700,7 +3744,10 @@
         <a:buChar char="•"/>
         <a:defRPr sz="2800" kern="1200">
           <a:solidFill>
-            <a:schemeClr val="tx1"/>
+            <a:schemeClr val="accent6">
+              <a:lumMod val="60000"/>
+              <a:lumOff val="40000"/>
+            </a:schemeClr>
           </a:solidFill>
           <a:latin typeface="+mn-lt"/>
           <a:ea typeface="+mn-ea"/>
@@ -2718,7 +3765,10 @@
         <a:buChar char="•"/>
         <a:defRPr sz="2400" kern="1200">
           <a:solidFill>
-            <a:schemeClr val="tx1"/>
+            <a:schemeClr val="accent6">
+              <a:lumMod val="60000"/>
+              <a:lumOff val="40000"/>
+            </a:schemeClr>
           </a:solidFill>
           <a:latin typeface="+mn-lt"/>
           <a:ea typeface="+mn-ea"/>
@@ -2736,7 +3786,10 @@
         <a:buChar char="•"/>
         <a:defRPr sz="2000" kern="1200">
           <a:solidFill>
-            <a:schemeClr val="tx1"/>
+            <a:schemeClr val="accent6">
+              <a:lumMod val="60000"/>
+              <a:lumOff val="40000"/>
+            </a:schemeClr>
           </a:solidFill>
           <a:latin typeface="+mn-lt"/>
           <a:ea typeface="+mn-ea"/>
@@ -2754,7 +3807,10 @@
         <a:buChar char="•"/>
         <a:defRPr sz="1800" kern="1200">
           <a:solidFill>
-            <a:schemeClr val="tx1"/>
+            <a:schemeClr val="accent6">
+              <a:lumMod val="60000"/>
+              <a:lumOff val="40000"/>
+            </a:schemeClr>
           </a:solidFill>
           <a:latin typeface="+mn-lt"/>
           <a:ea typeface="+mn-ea"/>
@@ -2772,7 +3828,10 @@
         <a:buChar char="•"/>
         <a:defRPr sz="1800" kern="1200">
           <a:solidFill>
-            <a:schemeClr val="tx1"/>
+            <a:schemeClr val="accent6">
+              <a:lumMod val="60000"/>
+              <a:lumOff val="40000"/>
+            </a:schemeClr>
           </a:solidFill>
           <a:latin typeface="+mn-lt"/>
           <a:ea typeface="+mn-ea"/>
@@ -2968,52 +4027,106 @@
           <a:chExt cx="0" cy="0"/>
         </a:xfrm>
       </p:grpSpPr>
-      <p:sp>
-        <p:nvSpPr>
-          <p:cNvPr id="2" name="Title 1"/>
-          <p:cNvSpPr>
-            <a:spLocks noGrp="1"/>
-          </p:cNvSpPr>
-          <p:nvPr>
-            <p:ph type="ctrTitle"/>
-          </p:nvPr>
-        </p:nvSpPr>
-        <p:spPr/>
-        <p:txBody>
-          <a:bodyPr/>
-          <a:lstStyle/>
-          <a:p>
-            <a:r>
-              <a:rPr lang="en-US" dirty="0" smtClean="0"/>
-              <a:t>AI Actual Projects</a:t>
-            </a:r>
-            <a:endParaRPr lang="en-US" dirty="0"/>
-          </a:p>
-        </p:txBody>
-      </p:sp>
-      <p:sp>
-        <p:nvSpPr>
-          <p:cNvPr id="3" name="Subtitle 2"/>
-          <p:cNvSpPr>
-            <a:spLocks noGrp="1"/>
-          </p:cNvSpPr>
-          <p:nvPr>
-            <p:ph type="subTitle" idx="1"/>
-          </p:nvPr>
-        </p:nvSpPr>
-        <p:spPr/>
-        <p:txBody>
-          <a:bodyPr/>
-          <a:lstStyle/>
-          <a:p>
-            <a:endParaRPr lang="en-US"/>
+      <p:pic>
+        <p:nvPicPr>
+          <p:cNvPr id="13" name="Picture 12"/>
+          <p:cNvPicPr>
+            <a:picLocks noChangeAspect="1"/>
+          </p:cNvPicPr>
+          <p:nvPr/>
+        </p:nvPicPr>
+        <p:blipFill>
+          <a:blip r:embed="rId2">
+            <a:extLst>
+              <a:ext uri="{28A0092B-C50C-407E-A947-70E740481C1C}">
+                <a14:useLocalDpi xmlns:a14="http://schemas.microsoft.com/office/drawing/2010/main" val="0"/>
+              </a:ext>
+            </a:extLst>
+          </a:blip>
+          <a:stretch>
+            <a:fillRect/>
+          </a:stretch>
+        </p:blipFill>
+        <p:spPr>
+          <a:xfrm>
+            <a:off x="7225819" y="3338005"/>
+            <a:ext cx="4587078" cy="3060064"/>
+          </a:xfrm>
+          <a:prstGeom prst="rect">
+            <a:avLst/>
+          </a:prstGeom>
+        </p:spPr>
+      </p:pic>
+      <p:pic>
+        <p:nvPicPr>
+          <p:cNvPr id="14" name="Picture 13"/>
+          <p:cNvPicPr>
+            <a:picLocks noChangeAspect="1"/>
+          </p:cNvPicPr>
+          <p:nvPr/>
+        </p:nvPicPr>
+        <p:blipFill>
+          <a:blip r:embed="rId3">
+            <a:extLst>
+              <a:ext uri="{28A0092B-C50C-407E-A947-70E740481C1C}">
+                <a14:useLocalDpi xmlns:a14="http://schemas.microsoft.com/office/drawing/2010/main" val="0"/>
+              </a:ext>
+            </a:extLst>
+          </a:blip>
+          <a:stretch>
+            <a:fillRect/>
+          </a:stretch>
+        </p:blipFill>
+        <p:spPr>
+          <a:xfrm>
+            <a:off x="164580" y="2166151"/>
+            <a:ext cx="6841974" cy="4279038"/>
+          </a:xfrm>
+          <a:prstGeom prst="rect">
+            <a:avLst/>
+          </a:prstGeom>
+        </p:spPr>
+      </p:pic>
+      <p:sp>
+        <p:nvSpPr>
+          <p:cNvPr id="15" name="TextBox 14"/>
+          <p:cNvSpPr txBox="1"/>
+          <p:nvPr/>
+        </p:nvSpPr>
+        <p:spPr>
+          <a:xfrm>
+            <a:off x="1207363" y="736847"/>
+            <a:ext cx="3232552" cy="461665"/>
+          </a:xfrm>
+          <a:prstGeom prst="rect">
+            <a:avLst/>
+          </a:prstGeom>
+          <a:noFill/>
+        </p:spPr>
+        <p:txBody>
+          <a:bodyPr wrap="none" rtlCol="0">
+            <a:spAutoFit/>
+          </a:bodyPr>
+          <a:lstStyle/>
+          <a:p>
+            <a:r>
+              <a:rPr lang="en-US" sz="2400" dirty="0">
+                <a:solidFill>
+                  <a:schemeClr val="accent6">
+                    <a:lumMod val="60000"/>
+                    <a:lumOff val="40000"/>
+                  </a:schemeClr>
+                </a:solidFill>
+              </a:rPr>
+              <a:t>Crowd density detection</a:t>
+            </a:r>
           </a:p>
         </p:txBody>
       </p:sp>
     </p:spTree>
     <p:extLst>
       <p:ext uri="{BB962C8B-B14F-4D97-AF65-F5344CB8AC3E}">
-        <p14:creationId xmlns:p14="http://schemas.microsoft.com/office/powerpoint/2010/main" val="2532572458"/>
+        <p14:creationId xmlns:p14="http://schemas.microsoft.com/office/powerpoint/2010/main" val="189383757"/>
       </p:ext>
     </p:extLst>
   </p:cSld>
@@ -3042,7 +4155,7 @@
       </p:grpSpPr>
       <p:pic>
         <p:nvPicPr>
-          <p:cNvPr id="13" name="Picture 12"/>
+          <p:cNvPr id="2" name="Picture 1"/>
           <p:cNvPicPr>
             <a:picLocks noChangeAspect="1"/>
           </p:cNvPicPr>
@@ -3062,54 +4175,24 @@
         </p:blipFill>
         <p:spPr>
           <a:xfrm>
-            <a:off x="7225819" y="3338005"/>
-            <a:ext cx="4587078" cy="3060064"/>
+            <a:off x="649414" y="1069848"/>
+            <a:ext cx="9827552" cy="5351637"/>
           </a:xfrm>
           <a:prstGeom prst="rect">
             <a:avLst/>
           </a:prstGeom>
         </p:spPr>
       </p:pic>
-      <p:pic>
-        <p:nvPicPr>
-          <p:cNvPr id="14" name="Picture 13"/>
-          <p:cNvPicPr>
-            <a:picLocks noChangeAspect="1"/>
-          </p:cNvPicPr>
+      <p:sp>
+        <p:nvSpPr>
+          <p:cNvPr id="3" name="TextBox 2"/>
+          <p:cNvSpPr txBox="1"/>
           <p:nvPr/>
-        </p:nvPicPr>
-        <p:blipFill>
-          <a:blip r:embed="rId3">
-            <a:extLst>
-              <a:ext uri="{28A0092B-C50C-407E-A947-70E740481C1C}">
-                <a14:useLocalDpi xmlns:a14="http://schemas.microsoft.com/office/drawing/2010/main" val="0"/>
-              </a:ext>
-            </a:extLst>
-          </a:blip>
-          <a:stretch>
-            <a:fillRect/>
-          </a:stretch>
-        </p:blipFill>
+        </p:nvSpPr>
         <p:spPr>
           <a:xfrm>
-            <a:off x="164580" y="2166151"/>
-            <a:ext cx="6841974" cy="4279038"/>
-          </a:xfrm>
-          <a:prstGeom prst="rect">
-            <a:avLst/>
-          </a:prstGeom>
-        </p:spPr>
-      </p:pic>
-      <p:sp>
-        <p:nvSpPr>
-          <p:cNvPr id="15" name="TextBox 14"/>
-          <p:cNvSpPr txBox="1"/>
-          <p:nvPr/>
-        </p:nvSpPr>
-        <p:spPr>
-          <a:xfrm>
-            <a:off x="1207363" y="736847"/>
-            <a:ext cx="2476191" cy="369332"/>
+            <a:off x="4119239" y="266330"/>
+            <a:ext cx="3809954" cy="461665"/>
           </a:xfrm>
           <a:prstGeom prst="rect">
             <a:avLst/>
@@ -3123,17 +4206,23 @@
           <a:lstStyle/>
           <a:p>
             <a:r>
-              <a:rPr lang="en-US" dirty="0" smtClean="0"/>
-              <a:t>Crowd density detection</a:t>
-            </a:r>
-            <a:endParaRPr lang="en-US" dirty="0"/>
+              <a:rPr lang="en-US" sz="2400" dirty="0">
+                <a:solidFill>
+                  <a:schemeClr val="accent6">
+                    <a:lumMod val="60000"/>
+                    <a:lumOff val="40000"/>
+                  </a:schemeClr>
+                </a:solidFill>
+              </a:rPr>
+              <a:t>Activity: Working or Standing</a:t>
+            </a:r>
           </a:p>
         </p:txBody>
       </p:sp>
     </p:spTree>
     <p:extLst>
       <p:ext uri="{BB962C8B-B14F-4D97-AF65-F5344CB8AC3E}">
-        <p14:creationId xmlns:p14="http://schemas.microsoft.com/office/powerpoint/2010/main" val="189383757"/>
+        <p14:creationId xmlns:p14="http://schemas.microsoft.com/office/powerpoint/2010/main" val="649702978"/>
       </p:ext>
     </p:extLst>
   </p:cSld>
@@ -3182,8 +4271,8 @@
         </p:blipFill>
         <p:spPr>
           <a:xfrm>
-            <a:off x="804862" y="1675151"/>
-            <a:ext cx="8531287" cy="4645750"/>
+            <a:off x="943975" y="1340529"/>
+            <a:ext cx="8582577" cy="5015301"/>
           </a:xfrm>
           <a:prstGeom prst="rect">
             <a:avLst/>
@@ -3198,8 +4287,8 @@
         </p:nvSpPr>
         <p:spPr>
           <a:xfrm>
-            <a:off x="4119239" y="266330"/>
-            <a:ext cx="2404248" cy="369332"/>
+            <a:off x="1447060" y="603682"/>
+            <a:ext cx="8013540" cy="461665"/>
           </a:xfrm>
           <a:prstGeom prst="rect">
             <a:avLst/>
@@ -3213,17 +4302,23 @@
           <a:lstStyle/>
           <a:p>
             <a:r>
-              <a:rPr lang="en-US" dirty="0" smtClean="0"/>
-              <a:t>Working or not working</a:t>
-            </a:r>
-            <a:endParaRPr lang="en-US" dirty="0"/>
+              <a:rPr lang="en-US" sz="2400" dirty="0">
+                <a:solidFill>
+                  <a:schemeClr val="accent6">
+                    <a:lumMod val="60000"/>
+                    <a:lumOff val="40000"/>
+                  </a:schemeClr>
+                </a:solidFill>
+              </a:rPr>
+              <a:t>Queue statistics: How many people waiting and their wait time</a:t>
+            </a:r>
           </a:p>
         </p:txBody>
       </p:sp>
     </p:spTree>
     <p:extLst>
       <p:ext uri="{BB962C8B-B14F-4D97-AF65-F5344CB8AC3E}">
-        <p14:creationId xmlns:p14="http://schemas.microsoft.com/office/powerpoint/2010/main" val="649702978"/>
+        <p14:creationId xmlns:p14="http://schemas.microsoft.com/office/powerpoint/2010/main" val="1263470637"/>
       </p:ext>
     </p:extLst>
   </p:cSld>
@@ -3272,96 +4367,6 @@
         </p:blipFill>
         <p:spPr>
           <a:xfrm>
-            <a:off x="943975" y="1340529"/>
-            <a:ext cx="8582577" cy="5015301"/>
-          </a:xfrm>
-          <a:prstGeom prst="rect">
-            <a:avLst/>
-          </a:prstGeom>
-        </p:spPr>
-      </p:pic>
-      <p:sp>
-        <p:nvSpPr>
-          <p:cNvPr id="3" name="TextBox 2"/>
-          <p:cNvSpPr txBox="1"/>
-          <p:nvPr/>
-        </p:nvSpPr>
-        <p:spPr>
-          <a:xfrm>
-            <a:off x="1447060" y="603682"/>
-            <a:ext cx="1671804" cy="369332"/>
-          </a:xfrm>
-          <a:prstGeom prst="rect">
-            <a:avLst/>
-          </a:prstGeom>
-          <a:noFill/>
-        </p:spPr>
-        <p:txBody>
-          <a:bodyPr wrap="none" rtlCol="0">
-            <a:spAutoFit/>
-          </a:bodyPr>
-          <a:lstStyle/>
-          <a:p>
-            <a:r>
-              <a:rPr lang="en-US" dirty="0" smtClean="0"/>
-              <a:t>Queue statistics</a:t>
-            </a:r>
-            <a:endParaRPr lang="en-US" dirty="0"/>
-          </a:p>
-        </p:txBody>
-      </p:sp>
-    </p:spTree>
-    <p:extLst>
-      <p:ext uri="{BB962C8B-B14F-4D97-AF65-F5344CB8AC3E}">
-        <p14:creationId xmlns:p14="http://schemas.microsoft.com/office/powerpoint/2010/main" val="1263470637"/>
-      </p:ext>
-    </p:extLst>
-  </p:cSld>
-  <p:clrMapOvr>
-    <a:masterClrMapping/>
-  </p:clrMapOvr>
-</p:sld>
-</file>
-
-<file path=ppt/slides/slide5.xml><?xml version="1.0" encoding="utf-8"?>
-<p:sld xmlns:a="http://schemas.openxmlformats.org/drawingml/2006/main" xmlns:r="http://schemas.openxmlformats.org/officeDocument/2006/relationships" xmlns:p="http://schemas.openxmlformats.org/presentationml/2006/main">
-  <p:cSld>
-    <p:spTree>
-      <p:nvGrpSpPr>
-        <p:cNvPr id="1" name=""/>
-        <p:cNvGrpSpPr/>
-        <p:nvPr/>
-      </p:nvGrpSpPr>
-      <p:grpSpPr>
-        <a:xfrm>
-          <a:off x="0" y="0"/>
-          <a:ext cx="0" cy="0"/>
-          <a:chOff x="0" y="0"/>
-          <a:chExt cx="0" cy="0"/>
-        </a:xfrm>
-      </p:grpSpPr>
-      <p:pic>
-        <p:nvPicPr>
-          <p:cNvPr id="2" name="Picture 1"/>
-          <p:cNvPicPr>
-            <a:picLocks noChangeAspect="1"/>
-          </p:cNvPicPr>
-          <p:nvPr/>
-        </p:nvPicPr>
-        <p:blipFill>
-          <a:blip r:embed="rId2">
-            <a:extLst>
-              <a:ext uri="{28A0092B-C50C-407E-A947-70E740481C1C}">
-                <a14:useLocalDpi xmlns:a14="http://schemas.microsoft.com/office/drawing/2010/main" val="0"/>
-              </a:ext>
-            </a:extLst>
-          </a:blip>
-          <a:stretch>
-            <a:fillRect/>
-          </a:stretch>
-        </p:blipFill>
-        <p:spPr>
-          <a:xfrm>
             <a:off x="181860" y="1394687"/>
             <a:ext cx="6561797" cy="3746824"/>
           </a:xfrm>
@@ -3409,7 +4414,7 @@
         <p:spPr>
           <a:xfrm>
             <a:off x="1420427" y="355107"/>
-            <a:ext cx="1629613" cy="369332"/>
+            <a:ext cx="2108591" cy="461665"/>
           </a:xfrm>
           <a:prstGeom prst="rect">
             <a:avLst/>
@@ -3423,10 +4428,16 @@
           <a:lstStyle/>
           <a:p>
             <a:r>
-              <a:rPr lang="en-US" dirty="0" smtClean="0"/>
+              <a:rPr lang="en-US" sz="2400" dirty="0">
+                <a:solidFill>
+                  <a:schemeClr val="accent6">
+                    <a:lumMod val="60000"/>
+                    <a:lumOff val="40000"/>
+                  </a:schemeClr>
+                </a:solidFill>
+              </a:rPr>
               <a:t>Theft detection</a:t>
             </a:r>
-            <a:endParaRPr lang="en-US" dirty="0"/>
           </a:p>
         </p:txBody>
       </p:sp>
@@ -3434,6 +4445,850 @@
     <p:extLst>
       <p:ext uri="{BB962C8B-B14F-4D97-AF65-F5344CB8AC3E}">
         <p14:creationId xmlns:p14="http://schemas.microsoft.com/office/powerpoint/2010/main" val="3022247743"/>
+      </p:ext>
+    </p:extLst>
+  </p:cSld>
+  <p:clrMapOvr>
+    <a:masterClrMapping/>
+  </p:clrMapOvr>
+</p:sld>
+</file>
+
+<file path=ppt/slides/slide5.xml><?xml version="1.0" encoding="utf-8"?>
+<p:sld xmlns:a="http://schemas.openxmlformats.org/drawingml/2006/main" xmlns:r="http://schemas.openxmlformats.org/officeDocument/2006/relationships" xmlns:p="http://schemas.openxmlformats.org/presentationml/2006/main">
+  <p:cSld>
+    <p:spTree>
+      <p:nvGrpSpPr>
+        <p:cNvPr id="1" name="">
+          <a:extLst>
+            <a:ext uri="{FF2B5EF4-FFF2-40B4-BE49-F238E27FC236}">
+              <a16:creationId xmlns:a16="http://schemas.microsoft.com/office/drawing/2014/main" id="{605638AB-651F-9ACA-942C-D37124DDE9EB}"/>
+            </a:ext>
+          </a:extLst>
+        </p:cNvPr>
+        <p:cNvGrpSpPr/>
+        <p:nvPr/>
+      </p:nvGrpSpPr>
+      <p:grpSpPr>
+        <a:xfrm>
+          <a:off x="0" y="0"/>
+          <a:ext cx="0" cy="0"/>
+          <a:chOff x="0" y="0"/>
+          <a:chExt cx="0" cy="0"/>
+        </a:xfrm>
+      </p:grpSpPr>
+      <p:sp>
+        <p:nvSpPr>
+          <p:cNvPr id="5" name="TextBox 4">
+            <a:extLst>
+              <a:ext uri="{FF2B5EF4-FFF2-40B4-BE49-F238E27FC236}">
+                <a16:creationId xmlns:a16="http://schemas.microsoft.com/office/drawing/2014/main" id="{C80B0D78-8152-F3A0-5617-CE6F5061E55A}"/>
+              </a:ext>
+            </a:extLst>
+          </p:cNvPr>
+          <p:cNvSpPr txBox="1"/>
+          <p:nvPr/>
+        </p:nvSpPr>
+        <p:spPr>
+          <a:xfrm>
+            <a:off x="576072" y="177951"/>
+            <a:ext cx="10899648" cy="461665"/>
+          </a:xfrm>
+          <a:prstGeom prst="rect">
+            <a:avLst/>
+          </a:prstGeom>
+          <a:noFill/>
+        </p:spPr>
+        <p:txBody>
+          <a:bodyPr wrap="square">
+            <a:spAutoFit/>
+          </a:bodyPr>
+          <a:lstStyle/>
+          <a:p>
+            <a:pPr marL="0" indent="0">
+              <a:buNone/>
+            </a:pPr>
+            <a:r>
+              <a:rPr lang="en-US" sz="2400" dirty="0">
+                <a:solidFill>
+                  <a:schemeClr val="accent6">
+                    <a:lumMod val="60000"/>
+                    <a:lumOff val="40000"/>
+                  </a:schemeClr>
+                </a:solidFill>
+              </a:rPr>
+              <a:t>Application of CNN</a:t>
+            </a:r>
+          </a:p>
+        </p:txBody>
+      </p:sp>
+      <p:pic>
+        <p:nvPicPr>
+          <p:cNvPr id="9" name="Picture 8" descr="Introduction to Emotion Recognition 2021 | RecFaces">
+            <a:extLst>
+              <a:ext uri="{FF2B5EF4-FFF2-40B4-BE49-F238E27FC236}">
+                <a16:creationId xmlns:a16="http://schemas.microsoft.com/office/drawing/2014/main" id="{7FA41FF9-DDC4-4F62-1A8D-5DE9DDBFAA71}"/>
+              </a:ext>
+            </a:extLst>
+          </p:cNvPr>
+          <p:cNvPicPr>
+            <a:picLocks noChangeAspect="1" noChangeArrowheads="1"/>
+          </p:cNvPicPr>
+          <p:nvPr/>
+        </p:nvPicPr>
+        <p:blipFill>
+          <a:blip r:embed="rId2">
+            <a:extLst>
+              <a:ext uri="{28A0092B-C50C-407E-A947-70E740481C1C}">
+                <a14:useLocalDpi xmlns:a14="http://schemas.microsoft.com/office/drawing/2010/main" val="0"/>
+              </a:ext>
+            </a:extLst>
+          </a:blip>
+          <a:srcRect/>
+          <a:stretch>
+            <a:fillRect/>
+          </a:stretch>
+        </p:blipFill>
+        <p:spPr bwMode="auto">
+          <a:xfrm>
+            <a:off x="127022" y="589220"/>
+            <a:ext cx="4650358" cy="2773407"/>
+          </a:xfrm>
+          <a:prstGeom prst="rect">
+            <a:avLst/>
+          </a:prstGeom>
+          <a:noFill/>
+          <a:extLst>
+            <a:ext uri="{909E8E84-426E-40DD-AFC4-6F175D3DCCD1}">
+              <a14:hiddenFill xmlns:a14="http://schemas.microsoft.com/office/drawing/2010/main">
+                <a:solidFill>
+                  <a:srgbClr val="FFFFFF"/>
+                </a:solidFill>
+              </a14:hiddenFill>
+            </a:ext>
+          </a:extLst>
+        </p:spPr>
+      </p:pic>
+      <p:sp>
+        <p:nvSpPr>
+          <p:cNvPr id="10" name="TextBox 9">
+            <a:extLst>
+              <a:ext uri="{FF2B5EF4-FFF2-40B4-BE49-F238E27FC236}">
+                <a16:creationId xmlns:a16="http://schemas.microsoft.com/office/drawing/2014/main" id="{1CD1EF5B-4665-2C9A-9AB4-7F28C1FA9499}"/>
+              </a:ext>
+            </a:extLst>
+          </p:cNvPr>
+          <p:cNvSpPr txBox="1"/>
+          <p:nvPr/>
+        </p:nvSpPr>
+        <p:spPr>
+          <a:xfrm>
+            <a:off x="393215" y="3362627"/>
+            <a:ext cx="3765550" cy="461665"/>
+          </a:xfrm>
+          <a:prstGeom prst="rect">
+            <a:avLst/>
+          </a:prstGeom>
+          <a:noFill/>
+        </p:spPr>
+        <p:txBody>
+          <a:bodyPr wrap="square" rtlCol="0">
+            <a:spAutoFit/>
+          </a:bodyPr>
+          <a:lstStyle/>
+          <a:p>
+            <a:r>
+              <a:rPr lang="en-IN" sz="2400" dirty="0">
+                <a:solidFill>
+                  <a:schemeClr val="accent6">
+                    <a:lumMod val="60000"/>
+                    <a:lumOff val="40000"/>
+                  </a:schemeClr>
+                </a:solidFill>
+              </a:rPr>
+              <a:t>Facial Emotion Recognition</a:t>
+            </a:r>
+          </a:p>
+        </p:txBody>
+      </p:sp>
+      <p:pic>
+        <p:nvPicPr>
+          <p:cNvPr id="11" name="Picture 10" descr="Online X-Ray Report Analysis | Chest X-Ray - MyMeds247">
+            <a:extLst>
+              <a:ext uri="{FF2B5EF4-FFF2-40B4-BE49-F238E27FC236}">
+                <a16:creationId xmlns:a16="http://schemas.microsoft.com/office/drawing/2014/main" id="{AE31C662-8CCA-4EC9-A380-E6A54C41D298}"/>
+              </a:ext>
+            </a:extLst>
+          </p:cNvPr>
+          <p:cNvPicPr>
+            <a:picLocks noChangeAspect="1" noChangeArrowheads="1"/>
+          </p:cNvPicPr>
+          <p:nvPr/>
+        </p:nvPicPr>
+        <p:blipFill>
+          <a:blip r:embed="rId3">
+            <a:extLst>
+              <a:ext uri="{28A0092B-C50C-407E-A947-70E740481C1C}">
+                <a14:useLocalDpi xmlns:a14="http://schemas.microsoft.com/office/drawing/2010/main" val="0"/>
+              </a:ext>
+            </a:extLst>
+          </a:blip>
+          <a:srcRect/>
+          <a:stretch>
+            <a:fillRect/>
+          </a:stretch>
+        </p:blipFill>
+        <p:spPr bwMode="auto">
+          <a:xfrm>
+            <a:off x="6698792" y="74256"/>
+            <a:ext cx="2635262" cy="2635262"/>
+          </a:xfrm>
+          <a:prstGeom prst="rect">
+            <a:avLst/>
+          </a:prstGeom>
+          <a:noFill/>
+          <a:extLst>
+            <a:ext uri="{909E8E84-426E-40DD-AFC4-6F175D3DCCD1}">
+              <a14:hiddenFill xmlns:a14="http://schemas.microsoft.com/office/drawing/2010/main">
+                <a:solidFill>
+                  <a:srgbClr val="FFFFFF"/>
+                </a:solidFill>
+              </a14:hiddenFill>
+            </a:ext>
+          </a:extLst>
+        </p:spPr>
+      </p:pic>
+      <p:sp>
+        <p:nvSpPr>
+          <p:cNvPr id="12" name="TextBox 11">
+            <a:extLst>
+              <a:ext uri="{FF2B5EF4-FFF2-40B4-BE49-F238E27FC236}">
+                <a16:creationId xmlns:a16="http://schemas.microsoft.com/office/drawing/2014/main" id="{5F971F62-3B79-356A-C382-D6C8BE1883CD}"/>
+              </a:ext>
+            </a:extLst>
+          </p:cNvPr>
+          <p:cNvSpPr txBox="1"/>
+          <p:nvPr/>
+        </p:nvSpPr>
+        <p:spPr>
+          <a:xfrm>
+            <a:off x="9334054" y="1885705"/>
+            <a:ext cx="2825025" cy="461665"/>
+          </a:xfrm>
+          <a:prstGeom prst="rect">
+            <a:avLst/>
+          </a:prstGeom>
+          <a:noFill/>
+        </p:spPr>
+        <p:txBody>
+          <a:bodyPr wrap="square" rtlCol="0">
+            <a:spAutoFit/>
+          </a:bodyPr>
+          <a:lstStyle/>
+          <a:p>
+            <a:r>
+              <a:rPr lang="en-IN" sz="2400" dirty="0">
+                <a:solidFill>
+                  <a:schemeClr val="accent6">
+                    <a:lumMod val="60000"/>
+                    <a:lumOff val="40000"/>
+                  </a:schemeClr>
+                </a:solidFill>
+              </a:rPr>
+              <a:t>X-ray Image Analysis</a:t>
+            </a:r>
+          </a:p>
+        </p:txBody>
+      </p:sp>
+      <p:pic>
+        <p:nvPicPr>
+          <p:cNvPr id="13" name="Picture 12" descr="GitHub - anandhkishan/Handwritten-Character-Recognition-using-CNN:  Recognizing handwritten character image using CNN with the CNN model  trained using EMNIST dataset. The work is extended by adding 12 more  characters from Tamil language to the dataset">
+            <a:extLst>
+              <a:ext uri="{FF2B5EF4-FFF2-40B4-BE49-F238E27FC236}">
+                <a16:creationId xmlns:a16="http://schemas.microsoft.com/office/drawing/2014/main" id="{81F94787-F7DB-F0F6-339B-6A474A04091D}"/>
+              </a:ext>
+            </a:extLst>
+          </p:cNvPr>
+          <p:cNvPicPr>
+            <a:picLocks noChangeAspect="1" noChangeArrowheads="1"/>
+          </p:cNvPicPr>
+          <p:nvPr/>
+        </p:nvPicPr>
+        <p:blipFill>
+          <a:blip r:embed="rId4">
+            <a:extLst>
+              <a:ext uri="{28A0092B-C50C-407E-A947-70E740481C1C}">
+                <a14:useLocalDpi xmlns:a14="http://schemas.microsoft.com/office/drawing/2010/main" val="0"/>
+              </a:ext>
+            </a:extLst>
+          </a:blip>
+          <a:srcRect/>
+          <a:stretch>
+            <a:fillRect/>
+          </a:stretch>
+        </p:blipFill>
+        <p:spPr bwMode="auto">
+          <a:xfrm>
+            <a:off x="4873752" y="2915135"/>
+            <a:ext cx="6740492" cy="3343038"/>
+          </a:xfrm>
+          <a:prstGeom prst="rect">
+            <a:avLst/>
+          </a:prstGeom>
+          <a:noFill/>
+          <a:extLst>
+            <a:ext uri="{909E8E84-426E-40DD-AFC4-6F175D3DCCD1}">
+              <a14:hiddenFill xmlns:a14="http://schemas.microsoft.com/office/drawing/2010/main">
+                <a:solidFill>
+                  <a:srgbClr val="FFFFFF"/>
+                </a:solidFill>
+              </a14:hiddenFill>
+            </a:ext>
+          </a:extLst>
+        </p:spPr>
+      </p:pic>
+      <p:sp>
+        <p:nvSpPr>
+          <p:cNvPr id="14" name="TextBox 13">
+            <a:extLst>
+              <a:ext uri="{FF2B5EF4-FFF2-40B4-BE49-F238E27FC236}">
+                <a16:creationId xmlns:a16="http://schemas.microsoft.com/office/drawing/2014/main" id="{22E569BF-E81C-D84A-3AC2-891E9C7DBC12}"/>
+              </a:ext>
+            </a:extLst>
+          </p:cNvPr>
+          <p:cNvSpPr txBox="1"/>
+          <p:nvPr/>
+        </p:nvSpPr>
+        <p:spPr>
+          <a:xfrm>
+            <a:off x="4873752" y="6258173"/>
+            <a:ext cx="4288282" cy="461665"/>
+          </a:xfrm>
+          <a:prstGeom prst="rect">
+            <a:avLst/>
+          </a:prstGeom>
+          <a:noFill/>
+        </p:spPr>
+        <p:txBody>
+          <a:bodyPr wrap="square" rtlCol="0">
+            <a:spAutoFit/>
+          </a:bodyPr>
+          <a:lstStyle/>
+          <a:p>
+            <a:r>
+              <a:rPr lang="en-IN" sz="2400" dirty="0">
+                <a:solidFill>
+                  <a:schemeClr val="accent6">
+                    <a:lumMod val="60000"/>
+                    <a:lumOff val="40000"/>
+                  </a:schemeClr>
+                </a:solidFill>
+              </a:rPr>
+              <a:t>Hand-written digit recognition</a:t>
+            </a:r>
+          </a:p>
+        </p:txBody>
+      </p:sp>
+    </p:spTree>
+    <p:extLst>
+      <p:ext uri="{BB962C8B-B14F-4D97-AF65-F5344CB8AC3E}">
+        <p14:creationId xmlns:p14="http://schemas.microsoft.com/office/powerpoint/2010/main" val="3891733197"/>
+      </p:ext>
+    </p:extLst>
+  </p:cSld>
+  <p:clrMapOvr>
+    <a:masterClrMapping/>
+  </p:clrMapOvr>
+</p:sld>
+</file>
+
+<file path=ppt/slides/slide6.xml><?xml version="1.0" encoding="utf-8"?>
+<p:sld xmlns:a="http://schemas.openxmlformats.org/drawingml/2006/main" xmlns:r="http://schemas.openxmlformats.org/officeDocument/2006/relationships" xmlns:p="http://schemas.openxmlformats.org/presentationml/2006/main">
+  <p:cSld>
+    <p:spTree>
+      <p:nvGrpSpPr>
+        <p:cNvPr id="1" name="">
+          <a:extLst>
+            <a:ext uri="{FF2B5EF4-FFF2-40B4-BE49-F238E27FC236}">
+              <a16:creationId xmlns:a16="http://schemas.microsoft.com/office/drawing/2014/main" id="{E1CDBCE0-ECF6-4F18-7C0E-B3BA25256BB3}"/>
+            </a:ext>
+          </a:extLst>
+        </p:cNvPr>
+        <p:cNvGrpSpPr/>
+        <p:nvPr/>
+      </p:nvGrpSpPr>
+      <p:grpSpPr>
+        <a:xfrm>
+          <a:off x="0" y="0"/>
+          <a:ext cx="0" cy="0"/>
+          <a:chOff x="0" y="0"/>
+          <a:chExt cx="0" cy="0"/>
+        </a:xfrm>
+      </p:grpSpPr>
+      <p:sp>
+        <p:nvSpPr>
+          <p:cNvPr id="5" name="TextBox 4">
+            <a:extLst>
+              <a:ext uri="{FF2B5EF4-FFF2-40B4-BE49-F238E27FC236}">
+                <a16:creationId xmlns:a16="http://schemas.microsoft.com/office/drawing/2014/main" id="{0FB7AA5A-EA67-8072-B615-2255E2A53D5A}"/>
+              </a:ext>
+            </a:extLst>
+          </p:cNvPr>
+          <p:cNvSpPr txBox="1"/>
+          <p:nvPr/>
+        </p:nvSpPr>
+        <p:spPr>
+          <a:xfrm>
+            <a:off x="576072" y="177951"/>
+            <a:ext cx="10899648" cy="461665"/>
+          </a:xfrm>
+          <a:prstGeom prst="rect">
+            <a:avLst/>
+          </a:prstGeom>
+          <a:noFill/>
+        </p:spPr>
+        <p:txBody>
+          <a:bodyPr wrap="square">
+            <a:spAutoFit/>
+          </a:bodyPr>
+          <a:lstStyle/>
+          <a:p>
+            <a:pPr marL="0" indent="0">
+              <a:buNone/>
+            </a:pPr>
+            <a:r>
+              <a:rPr lang="en-US" sz="2400" dirty="0">
+                <a:solidFill>
+                  <a:schemeClr val="accent6">
+                    <a:lumMod val="60000"/>
+                    <a:lumOff val="40000"/>
+                  </a:schemeClr>
+                </a:solidFill>
+              </a:rPr>
+              <a:t>Application of CNN</a:t>
+            </a:r>
+          </a:p>
+        </p:txBody>
+      </p:sp>
+      <p:pic>
+        <p:nvPicPr>
+          <p:cNvPr id="2" name="Picture 2" descr="How Automated Face Recognition Works | ROC">
+            <a:extLst>
+              <a:ext uri="{FF2B5EF4-FFF2-40B4-BE49-F238E27FC236}">
+                <a16:creationId xmlns:a16="http://schemas.microsoft.com/office/drawing/2014/main" id="{DEF37B7B-BF5E-16CB-D140-52A68AA5400B}"/>
+              </a:ext>
+            </a:extLst>
+          </p:cNvPr>
+          <p:cNvPicPr>
+            <a:picLocks noChangeAspect="1" noChangeArrowheads="1"/>
+          </p:cNvPicPr>
+          <p:nvPr/>
+        </p:nvPicPr>
+        <p:blipFill>
+          <a:blip r:embed="rId2">
+            <a:extLst>
+              <a:ext uri="{28A0092B-C50C-407E-A947-70E740481C1C}">
+                <a14:useLocalDpi xmlns:a14="http://schemas.microsoft.com/office/drawing/2010/main" val="0"/>
+              </a:ext>
+            </a:extLst>
+          </a:blip>
+          <a:srcRect/>
+          <a:stretch>
+            <a:fillRect/>
+          </a:stretch>
+        </p:blipFill>
+        <p:spPr bwMode="auto">
+          <a:xfrm>
+            <a:off x="136398" y="929356"/>
+            <a:ext cx="4160138" cy="2082235"/>
+          </a:xfrm>
+          <a:prstGeom prst="rect">
+            <a:avLst/>
+          </a:prstGeom>
+          <a:noFill/>
+          <a:extLst>
+            <a:ext uri="{909E8E84-426E-40DD-AFC4-6F175D3DCCD1}">
+              <a14:hiddenFill xmlns:a14="http://schemas.microsoft.com/office/drawing/2010/main">
+                <a:solidFill>
+                  <a:srgbClr val="FFFFFF"/>
+                </a:solidFill>
+              </a14:hiddenFill>
+            </a:ext>
+          </a:extLst>
+        </p:spPr>
+      </p:pic>
+      <p:sp>
+        <p:nvSpPr>
+          <p:cNvPr id="3" name="TextBox 2">
+            <a:extLst>
+              <a:ext uri="{FF2B5EF4-FFF2-40B4-BE49-F238E27FC236}">
+                <a16:creationId xmlns:a16="http://schemas.microsoft.com/office/drawing/2014/main" id="{B04F2DCE-A715-EA77-4A95-4FC3675C2A7E}"/>
+              </a:ext>
+            </a:extLst>
+          </p:cNvPr>
+          <p:cNvSpPr txBox="1"/>
+          <p:nvPr/>
+        </p:nvSpPr>
+        <p:spPr>
+          <a:xfrm>
+            <a:off x="4213225" y="6179355"/>
+            <a:ext cx="3765550" cy="461665"/>
+          </a:xfrm>
+          <a:prstGeom prst="rect">
+            <a:avLst/>
+          </a:prstGeom>
+          <a:noFill/>
+        </p:spPr>
+        <p:txBody>
+          <a:bodyPr wrap="square" rtlCol="0">
+            <a:spAutoFit/>
+          </a:bodyPr>
+          <a:lstStyle/>
+          <a:p>
+            <a:r>
+              <a:rPr lang="en-IN" sz="2400" dirty="0">
+                <a:solidFill>
+                  <a:schemeClr val="accent6">
+                    <a:lumMod val="60000"/>
+                    <a:lumOff val="40000"/>
+                  </a:schemeClr>
+                </a:solidFill>
+              </a:rPr>
+              <a:t>Self-Driving Vehicle</a:t>
+            </a:r>
+          </a:p>
+        </p:txBody>
+      </p:sp>
+      <p:pic>
+        <p:nvPicPr>
+          <p:cNvPr id="4" name="Picture 4" descr="Self-driving vehicles – Department of Computer Science">
+            <a:extLst>
+              <a:ext uri="{FF2B5EF4-FFF2-40B4-BE49-F238E27FC236}">
+                <a16:creationId xmlns:a16="http://schemas.microsoft.com/office/drawing/2014/main" id="{2A0F01AF-032B-F1D3-315D-47AAB7A44F57}"/>
+              </a:ext>
+            </a:extLst>
+          </p:cNvPr>
+          <p:cNvPicPr>
+            <a:picLocks noChangeAspect="1" noChangeArrowheads="1"/>
+          </p:cNvPicPr>
+          <p:nvPr/>
+        </p:nvPicPr>
+        <p:blipFill>
+          <a:blip r:embed="rId3">
+            <a:extLst>
+              <a:ext uri="{28A0092B-C50C-407E-A947-70E740481C1C}">
+                <a14:useLocalDpi xmlns:a14="http://schemas.microsoft.com/office/drawing/2010/main" val="0"/>
+              </a:ext>
+            </a:extLst>
+          </a:blip>
+          <a:srcRect/>
+          <a:stretch>
+            <a:fillRect/>
+          </a:stretch>
+        </p:blipFill>
+        <p:spPr bwMode="auto">
+          <a:xfrm>
+            <a:off x="3539849" y="3429000"/>
+            <a:ext cx="4808623" cy="2660771"/>
+          </a:xfrm>
+          <a:prstGeom prst="rect">
+            <a:avLst/>
+          </a:prstGeom>
+          <a:noFill/>
+          <a:extLst>
+            <a:ext uri="{909E8E84-426E-40DD-AFC4-6F175D3DCCD1}">
+              <a14:hiddenFill xmlns:a14="http://schemas.microsoft.com/office/drawing/2010/main">
+                <a:solidFill>
+                  <a:srgbClr val="FFFFFF"/>
+                </a:solidFill>
+              </a14:hiddenFill>
+            </a:ext>
+          </a:extLst>
+        </p:spPr>
+      </p:pic>
+      <p:sp>
+        <p:nvSpPr>
+          <p:cNvPr id="6" name="TextBox 5">
+            <a:extLst>
+              <a:ext uri="{FF2B5EF4-FFF2-40B4-BE49-F238E27FC236}">
+                <a16:creationId xmlns:a16="http://schemas.microsoft.com/office/drawing/2014/main" id="{B28E97AF-7F2B-53C1-93D7-DA27A718D607}"/>
+              </a:ext>
+            </a:extLst>
+          </p:cNvPr>
+          <p:cNvSpPr txBox="1"/>
+          <p:nvPr/>
+        </p:nvSpPr>
+        <p:spPr>
+          <a:xfrm>
+            <a:off x="131867" y="3174436"/>
+            <a:ext cx="2565400" cy="461665"/>
+          </a:xfrm>
+          <a:prstGeom prst="rect">
+            <a:avLst/>
+          </a:prstGeom>
+          <a:noFill/>
+        </p:spPr>
+        <p:txBody>
+          <a:bodyPr wrap="square" rtlCol="0">
+            <a:spAutoFit/>
+          </a:bodyPr>
+          <a:lstStyle/>
+          <a:p>
+            <a:r>
+              <a:rPr lang="en-IN" sz="2400" dirty="0">
+                <a:solidFill>
+                  <a:schemeClr val="accent6">
+                    <a:lumMod val="60000"/>
+                    <a:lumOff val="40000"/>
+                  </a:schemeClr>
+                </a:solidFill>
+              </a:rPr>
+              <a:t>Face Detection</a:t>
+            </a:r>
+          </a:p>
+        </p:txBody>
+      </p:sp>
+      <p:pic>
+        <p:nvPicPr>
+          <p:cNvPr id="7" name="Picture 6" descr="The Complete Guide to Object Detection ...">
+            <a:extLst>
+              <a:ext uri="{FF2B5EF4-FFF2-40B4-BE49-F238E27FC236}">
+                <a16:creationId xmlns:a16="http://schemas.microsoft.com/office/drawing/2014/main" id="{129CE660-D85B-AB80-EF4E-3B7CBC747F03}"/>
+              </a:ext>
+            </a:extLst>
+          </p:cNvPr>
+          <p:cNvPicPr>
+            <a:picLocks noChangeAspect="1" noChangeArrowheads="1"/>
+          </p:cNvPicPr>
+          <p:nvPr/>
+        </p:nvPicPr>
+        <p:blipFill>
+          <a:blip r:embed="rId4">
+            <a:extLst>
+              <a:ext uri="{28A0092B-C50C-407E-A947-70E740481C1C}">
+                <a14:useLocalDpi xmlns:a14="http://schemas.microsoft.com/office/drawing/2010/main" val="0"/>
+              </a:ext>
+            </a:extLst>
+          </a:blip>
+          <a:srcRect/>
+          <a:stretch>
+            <a:fillRect/>
+          </a:stretch>
+        </p:blipFill>
+        <p:spPr bwMode="auto">
+          <a:xfrm>
+            <a:off x="6897945" y="315957"/>
+            <a:ext cx="3773797" cy="2534229"/>
+          </a:xfrm>
+          <a:prstGeom prst="rect">
+            <a:avLst/>
+          </a:prstGeom>
+          <a:noFill/>
+          <a:extLst>
+            <a:ext uri="{909E8E84-426E-40DD-AFC4-6F175D3DCCD1}">
+              <a14:hiddenFill xmlns:a14="http://schemas.microsoft.com/office/drawing/2010/main">
+                <a:solidFill>
+                  <a:srgbClr val="FFFFFF"/>
+                </a:solidFill>
+              </a14:hiddenFill>
+            </a:ext>
+          </a:extLst>
+        </p:spPr>
+      </p:pic>
+      <p:sp>
+        <p:nvSpPr>
+          <p:cNvPr id="8" name="TextBox 7">
+            <a:extLst>
+              <a:ext uri="{FF2B5EF4-FFF2-40B4-BE49-F238E27FC236}">
+                <a16:creationId xmlns:a16="http://schemas.microsoft.com/office/drawing/2014/main" id="{39EA215F-D7A7-23AC-B334-2381E335B6B6}"/>
+              </a:ext>
+            </a:extLst>
+          </p:cNvPr>
+          <p:cNvSpPr txBox="1"/>
+          <p:nvPr/>
+        </p:nvSpPr>
+        <p:spPr>
+          <a:xfrm>
+            <a:off x="8681720" y="2908760"/>
+            <a:ext cx="2794000" cy="461665"/>
+          </a:xfrm>
+          <a:prstGeom prst="rect">
+            <a:avLst/>
+          </a:prstGeom>
+          <a:noFill/>
+        </p:spPr>
+        <p:txBody>
+          <a:bodyPr wrap="square" rtlCol="0">
+            <a:spAutoFit/>
+          </a:bodyPr>
+          <a:lstStyle/>
+          <a:p>
+            <a:r>
+              <a:rPr lang="en-IN" sz="2400" dirty="0">
+                <a:solidFill>
+                  <a:schemeClr val="accent6">
+                    <a:lumMod val="60000"/>
+                    <a:lumOff val="40000"/>
+                  </a:schemeClr>
+                </a:solidFill>
+              </a:rPr>
+              <a:t>Object Detection</a:t>
+            </a:r>
+          </a:p>
+        </p:txBody>
+      </p:sp>
+    </p:spTree>
+    <p:extLst>
+      <p:ext uri="{BB962C8B-B14F-4D97-AF65-F5344CB8AC3E}">
+        <p14:creationId xmlns:p14="http://schemas.microsoft.com/office/powerpoint/2010/main" val="1568839184"/>
+      </p:ext>
+    </p:extLst>
+  </p:cSld>
+  <p:clrMapOvr>
+    <a:masterClrMapping/>
+  </p:clrMapOvr>
+</p:sld>
+</file>
+
+<file path=ppt/slides/slide7.xml><?xml version="1.0" encoding="utf-8"?>
+<p:sld xmlns:a="http://schemas.openxmlformats.org/drawingml/2006/main" xmlns:r="http://schemas.openxmlformats.org/officeDocument/2006/relationships" xmlns:p="http://schemas.openxmlformats.org/presentationml/2006/main">
+  <p:cSld>
+    <p:spTree>
+      <p:nvGrpSpPr>
+        <p:cNvPr id="1" name="">
+          <a:extLst>
+            <a:ext uri="{FF2B5EF4-FFF2-40B4-BE49-F238E27FC236}">
+              <a16:creationId xmlns:a16="http://schemas.microsoft.com/office/drawing/2014/main" id="{DD931D7F-4279-DA2E-FA64-6CF3C441D414}"/>
+            </a:ext>
+          </a:extLst>
+        </p:cNvPr>
+        <p:cNvGrpSpPr/>
+        <p:nvPr/>
+      </p:nvGrpSpPr>
+      <p:grpSpPr>
+        <a:xfrm>
+          <a:off x="0" y="0"/>
+          <a:ext cx="0" cy="0"/>
+          <a:chOff x="0" y="0"/>
+          <a:chExt cx="0" cy="0"/>
+        </a:xfrm>
+      </p:grpSpPr>
+      <p:sp>
+        <p:nvSpPr>
+          <p:cNvPr id="2" name="Title 1">
+            <a:extLst>
+              <a:ext uri="{FF2B5EF4-FFF2-40B4-BE49-F238E27FC236}">
+                <a16:creationId xmlns:a16="http://schemas.microsoft.com/office/drawing/2014/main" id="{795E1B75-886E-0812-B2FD-DD250C225521}"/>
+              </a:ext>
+            </a:extLst>
+          </p:cNvPr>
+          <p:cNvSpPr>
+            <a:spLocks noGrp="1"/>
+          </p:cNvSpPr>
+          <p:nvPr>
+            <p:ph type="title"/>
+          </p:nvPr>
+        </p:nvSpPr>
+        <p:spPr>
+          <a:xfrm>
+            <a:off x="274320" y="136525"/>
+            <a:ext cx="11466576" cy="832739"/>
+          </a:xfrm>
+        </p:spPr>
+        <p:txBody>
+          <a:bodyPr>
+            <a:normAutofit/>
+          </a:bodyPr>
+          <a:lstStyle/>
+          <a:p>
+            <a:r>
+              <a:rPr lang="en-US" sz="3600" dirty="0"/>
+              <a:t>EXTRA</a:t>
+            </a:r>
+          </a:p>
+        </p:txBody>
+      </p:sp>
+      <p:sp>
+        <p:nvSpPr>
+          <p:cNvPr id="4" name="TextBox 3">
+            <a:extLst>
+              <a:ext uri="{FF2B5EF4-FFF2-40B4-BE49-F238E27FC236}">
+                <a16:creationId xmlns:a16="http://schemas.microsoft.com/office/drawing/2014/main" id="{902F8BE4-9CEA-0DAD-0357-E0A8215F169D}"/>
+              </a:ext>
+            </a:extLst>
+          </p:cNvPr>
+          <p:cNvSpPr txBox="1"/>
+          <p:nvPr/>
+        </p:nvSpPr>
+        <p:spPr>
+          <a:xfrm>
+            <a:off x="274320" y="933117"/>
+            <a:ext cx="11658600" cy="646331"/>
+          </a:xfrm>
+          <a:prstGeom prst="rect">
+            <a:avLst/>
+          </a:prstGeom>
+          <a:noFill/>
+        </p:spPr>
+        <p:txBody>
+          <a:bodyPr wrap="square">
+            <a:spAutoFit/>
+          </a:bodyPr>
+          <a:lstStyle/>
+          <a:p>
+            <a:pPr marL="0" indent="0">
+              <a:buNone/>
+            </a:pPr>
+            <a:r>
+              <a:rPr lang="en-US" dirty="0" err="1">
+                <a:solidFill>
+                  <a:schemeClr val="accent6">
+                    <a:lumMod val="60000"/>
+                    <a:lumOff val="40000"/>
+                  </a:schemeClr>
+                </a:solidFill>
+              </a:rPr>
+              <a:t>Xxxxxxxxxxx</a:t>
+            </a:r>
+            <a:endParaRPr lang="en-US" dirty="0">
+              <a:solidFill>
+                <a:schemeClr val="accent6">
+                  <a:lumMod val="60000"/>
+                  <a:lumOff val="40000"/>
+                </a:schemeClr>
+              </a:solidFill>
+            </a:endParaRPr>
+          </a:p>
+          <a:p>
+            <a:pPr marL="0" indent="0">
+              <a:buNone/>
+            </a:pPr>
+            <a:r>
+              <a:rPr lang="en-US" dirty="0" err="1">
+                <a:solidFill>
+                  <a:schemeClr val="accent6">
+                    <a:lumMod val="60000"/>
+                    <a:lumOff val="40000"/>
+                  </a:schemeClr>
+                </a:solidFill>
+              </a:rPr>
+              <a:t>xxxxxxxxxxxx</a:t>
+            </a:r>
+            <a:endParaRPr lang="en-US" dirty="0">
+              <a:solidFill>
+                <a:schemeClr val="accent6">
+                  <a:lumMod val="60000"/>
+                  <a:lumOff val="40000"/>
+                </a:schemeClr>
+              </a:solidFill>
+            </a:endParaRPr>
+          </a:p>
+        </p:txBody>
+      </p:sp>
+    </p:spTree>
+    <p:extLst>
+      <p:ext uri="{BB962C8B-B14F-4D97-AF65-F5344CB8AC3E}">
+        <p14:creationId xmlns:p14="http://schemas.microsoft.com/office/powerpoint/2010/main" val="366625378"/>
       </p:ext>
     </p:extLst>
   </p:cSld>
@@ -3460,7 +5315,7 @@
         <a:srgbClr val="E7E6E6"/>
       </a:lt2>
       <a:accent1>
-        <a:srgbClr val="5B9BD5"/>
+        <a:srgbClr val="4472C4"/>
       </a:accent1>
       <a:accent2>
         <a:srgbClr val="ED7D31"/>
@@ -3472,7 +5327,7 @@
         <a:srgbClr val="FFC000"/>
       </a:accent4>
       <a:accent5>
-        <a:srgbClr val="4472C4"/>
+        <a:srgbClr val="5B9BD5"/>
       </a:accent5>
       <a:accent6>
         <a:srgbClr val="70AD47"/>
@@ -3519,6 +5374,23 @@
         <a:font script="Viet" typeface="Times New Roman"/>
         <a:font script="Uigh" typeface="Microsoft Uighur"/>
         <a:font script="Geor" typeface="Sylfaen"/>
+        <a:font script="Armn" typeface="Arial"/>
+        <a:font script="Bugi" typeface="Leelawadee UI"/>
+        <a:font script="Bopo" typeface="Microsoft JhengHei"/>
+        <a:font script="Java" typeface="Javanese Text"/>
+        <a:font script="Lisu" typeface="Segoe UI"/>
+        <a:font script="Mymr" typeface="Myanmar Text"/>
+        <a:font script="Nkoo" typeface="Ebrima"/>
+        <a:font script="Olck" typeface="Nirmala UI"/>
+        <a:font script="Osma" typeface="Ebrima"/>
+        <a:font script="Phag" typeface="Phagspa"/>
+        <a:font script="Syrn" typeface="Estrangelo Edessa"/>
+        <a:font script="Syrj" typeface="Estrangelo Edessa"/>
+        <a:font script="Syre" typeface="Estrangelo Edessa"/>
+        <a:font script="Sora" typeface="Nirmala UI"/>
+        <a:font script="Tale" typeface="Microsoft Tai Le"/>
+        <a:font script="Talu" typeface="Microsoft New Tai Lue"/>
+        <a:font script="Tfng" typeface="Ebrima"/>
       </a:majorFont>
       <a:minorFont>
         <a:latin typeface="Calibri" panose="020F0502020204030204"/>
@@ -3554,6 +5426,613 @@
         <a:font script="Viet" typeface="Arial"/>
         <a:font script="Uigh" typeface="Microsoft Uighur"/>
         <a:font script="Geor" typeface="Sylfaen"/>
+        <a:font script="Armn" typeface="Arial"/>
+        <a:font script="Bugi" typeface="Leelawadee UI"/>
+        <a:font script="Bopo" typeface="Microsoft JhengHei"/>
+        <a:font script="Java" typeface="Javanese Text"/>
+        <a:font script="Lisu" typeface="Segoe UI"/>
+        <a:font script="Mymr" typeface="Myanmar Text"/>
+        <a:font script="Nkoo" typeface="Ebrima"/>
+        <a:font script="Olck" typeface="Nirmala UI"/>
+        <a:font script="Osma" typeface="Ebrima"/>
+        <a:font script="Phag" typeface="Phagspa"/>
+        <a:font script="Syrn" typeface="Estrangelo Edessa"/>
+        <a:font script="Syrj" typeface="Estrangelo Edessa"/>
+        <a:font script="Syre" typeface="Estrangelo Edessa"/>
+        <a:font script="Sora" typeface="Nirmala UI"/>
+        <a:font script="Tale" typeface="Microsoft Tai Le"/>
+        <a:font script="Talu" typeface="Microsoft New Tai Lue"/>
+        <a:font script="Tfng" typeface="Ebrima"/>
+      </a:minorFont>
+    </a:fontScheme>
+    <a:fmtScheme name="Office">
+      <a:fillStyleLst>
+        <a:solidFill>
+          <a:schemeClr val="phClr"/>
+        </a:solidFill>
+        <a:gradFill rotWithShape="1">
+          <a:gsLst>
+            <a:gs pos="0">
+              <a:schemeClr val="phClr">
+                <a:lumMod val="110000"/>
+                <a:satMod val="105000"/>
+                <a:tint val="67000"/>
+              </a:schemeClr>
+            </a:gs>
+            <a:gs pos="50000">
+              <a:schemeClr val="phClr">
+                <a:lumMod val="105000"/>
+                <a:satMod val="103000"/>
+                <a:tint val="73000"/>
+              </a:schemeClr>
+            </a:gs>
+            <a:gs pos="100000">
+              <a:schemeClr val="phClr">
+                <a:lumMod val="105000"/>
+                <a:satMod val="109000"/>
+                <a:tint val="81000"/>
+              </a:schemeClr>
+            </a:gs>
+          </a:gsLst>
+          <a:lin ang="5400000" scaled="0"/>
+        </a:gradFill>
+        <a:gradFill rotWithShape="1">
+          <a:gsLst>
+            <a:gs pos="0">
+              <a:schemeClr val="phClr">
+                <a:satMod val="103000"/>
+                <a:lumMod val="102000"/>
+                <a:tint val="94000"/>
+              </a:schemeClr>
+            </a:gs>
+            <a:gs pos="50000">
+              <a:schemeClr val="phClr">
+                <a:satMod val="110000"/>
+                <a:lumMod val="100000"/>
+                <a:shade val="100000"/>
+              </a:schemeClr>
+            </a:gs>
+            <a:gs pos="100000">
+              <a:schemeClr val="phClr">
+                <a:lumMod val="99000"/>
+                <a:satMod val="120000"/>
+                <a:shade val="78000"/>
+              </a:schemeClr>
+            </a:gs>
+          </a:gsLst>
+          <a:lin ang="5400000" scaled="0"/>
+        </a:gradFill>
+      </a:fillStyleLst>
+      <a:lnStyleLst>
+        <a:ln w="6350" cap="flat" cmpd="sng" algn="ctr">
+          <a:solidFill>
+            <a:schemeClr val="phClr"/>
+          </a:solidFill>
+          <a:prstDash val="solid"/>
+          <a:miter lim="800000"/>
+        </a:ln>
+        <a:ln w="12700" cap="flat" cmpd="sng" algn="ctr">
+          <a:solidFill>
+            <a:schemeClr val="phClr"/>
+          </a:solidFill>
+          <a:prstDash val="solid"/>
+          <a:miter lim="800000"/>
+        </a:ln>
+        <a:ln w="19050" cap="flat" cmpd="sng" algn="ctr">
+          <a:solidFill>
+            <a:schemeClr val="phClr"/>
+          </a:solidFill>
+          <a:prstDash val="solid"/>
+          <a:miter lim="800000"/>
+        </a:ln>
+      </a:lnStyleLst>
+      <a:effectStyleLst>
+        <a:effectStyle>
+          <a:effectLst/>
+        </a:effectStyle>
+        <a:effectStyle>
+          <a:effectLst/>
+        </a:effectStyle>
+        <a:effectStyle>
+          <a:effectLst>
+            <a:outerShdw blurRad="57150" dist="19050" dir="5400000" algn="ctr" rotWithShape="0">
+              <a:srgbClr val="000000">
+                <a:alpha val="63000"/>
+              </a:srgbClr>
+            </a:outerShdw>
+          </a:effectLst>
+        </a:effectStyle>
+      </a:effectStyleLst>
+      <a:bgFillStyleLst>
+        <a:solidFill>
+          <a:schemeClr val="phClr"/>
+        </a:solidFill>
+        <a:solidFill>
+          <a:schemeClr val="phClr">
+            <a:tint val="95000"/>
+            <a:satMod val="170000"/>
+          </a:schemeClr>
+        </a:solidFill>
+        <a:gradFill rotWithShape="1">
+          <a:gsLst>
+            <a:gs pos="0">
+              <a:schemeClr val="phClr">
+                <a:tint val="93000"/>
+                <a:satMod val="150000"/>
+                <a:shade val="98000"/>
+                <a:lumMod val="102000"/>
+              </a:schemeClr>
+            </a:gs>
+            <a:gs pos="50000">
+              <a:schemeClr val="phClr">
+                <a:tint val="98000"/>
+                <a:satMod val="130000"/>
+                <a:shade val="90000"/>
+                <a:lumMod val="103000"/>
+              </a:schemeClr>
+            </a:gs>
+            <a:gs pos="100000">
+              <a:schemeClr val="phClr">
+                <a:shade val="63000"/>
+                <a:satMod val="120000"/>
+              </a:schemeClr>
+            </a:gs>
+          </a:gsLst>
+          <a:lin ang="5400000" scaled="0"/>
+        </a:gradFill>
+      </a:bgFillStyleLst>
+    </a:fmtScheme>
+  </a:themeElements>
+  <a:objectDefaults/>
+  <a:extraClrSchemeLst/>
+  <a:extLst>
+    <a:ext uri="{05A4C25C-085E-4340-85A3-A5531E510DB2}">
+      <thm15:themeFamily xmlns:thm15="http://schemas.microsoft.com/office/thememl/2012/main" name="Office Theme" id="{62F939B6-93AF-4DB8-9C6B-D6C7DFDC589F}" vid="{4A3C46E8-61CC-4603-A589-7422A47A8E4A}"/>
+    </a:ext>
+  </a:extLst>
+</a:theme>
+</file>
+
+<file path=ppt/theme/theme2.xml><?xml version="1.0" encoding="utf-8"?>
+<a:theme xmlns:a="http://schemas.openxmlformats.org/drawingml/2006/main" name="Office Theme">
+  <a:themeElements>
+    <a:clrScheme name="Office">
+      <a:dk1>
+        <a:sysClr val="windowText" lastClr="000000"/>
+      </a:dk1>
+      <a:lt1>
+        <a:sysClr val="window" lastClr="FFFFFF"/>
+      </a:lt1>
+      <a:dk2>
+        <a:srgbClr val="44546A"/>
+      </a:dk2>
+      <a:lt2>
+        <a:srgbClr val="E7E6E6"/>
+      </a:lt2>
+      <a:accent1>
+        <a:srgbClr val="4472C4"/>
+      </a:accent1>
+      <a:accent2>
+        <a:srgbClr val="ED7D31"/>
+      </a:accent2>
+      <a:accent3>
+        <a:srgbClr val="A5A5A5"/>
+      </a:accent3>
+      <a:accent4>
+        <a:srgbClr val="FFC000"/>
+      </a:accent4>
+      <a:accent5>
+        <a:srgbClr val="5B9BD5"/>
+      </a:accent5>
+      <a:accent6>
+        <a:srgbClr val="70AD47"/>
+      </a:accent6>
+      <a:hlink>
+        <a:srgbClr val="0563C1"/>
+      </a:hlink>
+      <a:folHlink>
+        <a:srgbClr val="954F72"/>
+      </a:folHlink>
+    </a:clrScheme>
+    <a:fontScheme name="Office">
+      <a:majorFont>
+        <a:latin typeface="Calibri Light" panose="020F0302020204030204"/>
+        <a:ea typeface=""/>
+        <a:cs typeface=""/>
+        <a:font script="Jpan" typeface="游ゴシック Light"/>
+        <a:font script="Hang" typeface="맑은 고딕"/>
+        <a:font script="Hans" typeface="等线 Light"/>
+        <a:font script="Hant" typeface="新細明體"/>
+        <a:font script="Arab" typeface="Times New Roman"/>
+        <a:font script="Hebr" typeface="Times New Roman"/>
+        <a:font script="Thai" typeface="Angsana New"/>
+        <a:font script="Ethi" typeface="Nyala"/>
+        <a:font script="Beng" typeface="Vrinda"/>
+        <a:font script="Gujr" typeface="Shruti"/>
+        <a:font script="Khmr" typeface="MoolBoran"/>
+        <a:font script="Knda" typeface="Tunga"/>
+        <a:font script="Guru" typeface="Raavi"/>
+        <a:font script="Cans" typeface="Euphemia"/>
+        <a:font script="Cher" typeface="Plantagenet Cherokee"/>
+        <a:font script="Yiii" typeface="Microsoft Yi Baiti"/>
+        <a:font script="Tibt" typeface="Microsoft Himalaya"/>
+        <a:font script="Thaa" typeface="MV Boli"/>
+        <a:font script="Deva" typeface="Mangal"/>
+        <a:font script="Telu" typeface="Gautami"/>
+        <a:font script="Taml" typeface="Latha"/>
+        <a:font script="Syrc" typeface="Estrangelo Edessa"/>
+        <a:font script="Orya" typeface="Kalinga"/>
+        <a:font script="Mlym" typeface="Kartika"/>
+        <a:font script="Laoo" typeface="DokChampa"/>
+        <a:font script="Sinh" typeface="Iskoola Pota"/>
+        <a:font script="Mong" typeface="Mongolian Baiti"/>
+        <a:font script="Viet" typeface="Times New Roman"/>
+        <a:font script="Uigh" typeface="Microsoft Uighur"/>
+        <a:font script="Geor" typeface="Sylfaen"/>
+        <a:font script="Armn" typeface="Arial"/>
+        <a:font script="Bugi" typeface="Leelawadee UI"/>
+        <a:font script="Bopo" typeface="Microsoft JhengHei"/>
+        <a:font script="Java" typeface="Javanese Text"/>
+        <a:font script="Lisu" typeface="Segoe UI"/>
+        <a:font script="Mymr" typeface="Myanmar Text"/>
+        <a:font script="Nkoo" typeface="Ebrima"/>
+        <a:font script="Olck" typeface="Nirmala UI"/>
+        <a:font script="Osma" typeface="Ebrima"/>
+        <a:font script="Phag" typeface="Phagspa"/>
+        <a:font script="Syrn" typeface="Estrangelo Edessa"/>
+        <a:font script="Syrj" typeface="Estrangelo Edessa"/>
+        <a:font script="Syre" typeface="Estrangelo Edessa"/>
+        <a:font script="Sora" typeface="Nirmala UI"/>
+        <a:font script="Tale" typeface="Microsoft Tai Le"/>
+        <a:font script="Talu" typeface="Microsoft New Tai Lue"/>
+        <a:font script="Tfng" typeface="Ebrima"/>
+      </a:majorFont>
+      <a:minorFont>
+        <a:latin typeface="Calibri" panose="020F0502020204030204"/>
+        <a:ea typeface=""/>
+        <a:cs typeface=""/>
+        <a:font script="Jpan" typeface="游ゴシック"/>
+        <a:font script="Hang" typeface="맑은 고딕"/>
+        <a:font script="Hans" typeface="等线"/>
+        <a:font script="Hant" typeface="新細明體"/>
+        <a:font script="Arab" typeface="Arial"/>
+        <a:font script="Hebr" typeface="Arial"/>
+        <a:font script="Thai" typeface="Cordia New"/>
+        <a:font script="Ethi" typeface="Nyala"/>
+        <a:font script="Beng" typeface="Vrinda"/>
+        <a:font script="Gujr" typeface="Shruti"/>
+        <a:font script="Khmr" typeface="DaunPenh"/>
+        <a:font script="Knda" typeface="Tunga"/>
+        <a:font script="Guru" typeface="Raavi"/>
+        <a:font script="Cans" typeface="Euphemia"/>
+        <a:font script="Cher" typeface="Plantagenet Cherokee"/>
+        <a:font script="Yiii" typeface="Microsoft Yi Baiti"/>
+        <a:font script="Tibt" typeface="Microsoft Himalaya"/>
+        <a:font script="Thaa" typeface="MV Boli"/>
+        <a:font script="Deva" typeface="Mangal"/>
+        <a:font script="Telu" typeface="Gautami"/>
+        <a:font script="Taml" typeface="Latha"/>
+        <a:font script="Syrc" typeface="Estrangelo Edessa"/>
+        <a:font script="Orya" typeface="Kalinga"/>
+        <a:font script="Mlym" typeface="Kartika"/>
+        <a:font script="Laoo" typeface="DokChampa"/>
+        <a:font script="Sinh" typeface="Iskoola Pota"/>
+        <a:font script="Mong" typeface="Mongolian Baiti"/>
+        <a:font script="Viet" typeface="Arial"/>
+        <a:font script="Uigh" typeface="Microsoft Uighur"/>
+        <a:font script="Geor" typeface="Sylfaen"/>
+        <a:font script="Armn" typeface="Arial"/>
+        <a:font script="Bugi" typeface="Leelawadee UI"/>
+        <a:font script="Bopo" typeface="Microsoft JhengHei"/>
+        <a:font script="Java" typeface="Javanese Text"/>
+        <a:font script="Lisu" typeface="Segoe UI"/>
+        <a:font script="Mymr" typeface="Myanmar Text"/>
+        <a:font script="Nkoo" typeface="Ebrima"/>
+        <a:font script="Olck" typeface="Nirmala UI"/>
+        <a:font script="Osma" typeface="Ebrima"/>
+        <a:font script="Phag" typeface="Phagspa"/>
+        <a:font script="Syrn" typeface="Estrangelo Edessa"/>
+        <a:font script="Syrj" typeface="Estrangelo Edessa"/>
+        <a:font script="Syre" typeface="Estrangelo Edessa"/>
+        <a:font script="Sora" typeface="Nirmala UI"/>
+        <a:font script="Tale" typeface="Microsoft Tai Le"/>
+        <a:font script="Talu" typeface="Microsoft New Tai Lue"/>
+        <a:font script="Tfng" typeface="Ebrima"/>
+      </a:minorFont>
+    </a:fontScheme>
+    <a:fmtScheme name="Office">
+      <a:fillStyleLst>
+        <a:solidFill>
+          <a:schemeClr val="phClr"/>
+        </a:solidFill>
+        <a:gradFill rotWithShape="1">
+          <a:gsLst>
+            <a:gs pos="0">
+              <a:schemeClr val="phClr">
+                <a:lumMod val="110000"/>
+                <a:satMod val="105000"/>
+                <a:tint val="67000"/>
+              </a:schemeClr>
+            </a:gs>
+            <a:gs pos="50000">
+              <a:schemeClr val="phClr">
+                <a:lumMod val="105000"/>
+                <a:satMod val="103000"/>
+                <a:tint val="73000"/>
+              </a:schemeClr>
+            </a:gs>
+            <a:gs pos="100000">
+              <a:schemeClr val="phClr">
+                <a:lumMod val="105000"/>
+                <a:satMod val="109000"/>
+                <a:tint val="81000"/>
+              </a:schemeClr>
+            </a:gs>
+          </a:gsLst>
+          <a:lin ang="5400000" scaled="0"/>
+        </a:gradFill>
+        <a:gradFill rotWithShape="1">
+          <a:gsLst>
+            <a:gs pos="0">
+              <a:schemeClr val="phClr">
+                <a:satMod val="103000"/>
+                <a:lumMod val="102000"/>
+                <a:tint val="94000"/>
+              </a:schemeClr>
+            </a:gs>
+            <a:gs pos="50000">
+              <a:schemeClr val="phClr">
+                <a:satMod val="110000"/>
+                <a:lumMod val="100000"/>
+                <a:shade val="100000"/>
+              </a:schemeClr>
+            </a:gs>
+            <a:gs pos="100000">
+              <a:schemeClr val="phClr">
+                <a:lumMod val="99000"/>
+                <a:satMod val="120000"/>
+                <a:shade val="78000"/>
+              </a:schemeClr>
+            </a:gs>
+          </a:gsLst>
+          <a:lin ang="5400000" scaled="0"/>
+        </a:gradFill>
+      </a:fillStyleLst>
+      <a:lnStyleLst>
+        <a:ln w="6350" cap="flat" cmpd="sng" algn="ctr">
+          <a:solidFill>
+            <a:schemeClr val="phClr"/>
+          </a:solidFill>
+          <a:prstDash val="solid"/>
+          <a:miter lim="800000"/>
+        </a:ln>
+        <a:ln w="12700" cap="flat" cmpd="sng" algn="ctr">
+          <a:solidFill>
+            <a:schemeClr val="phClr"/>
+          </a:solidFill>
+          <a:prstDash val="solid"/>
+          <a:miter lim="800000"/>
+        </a:ln>
+        <a:ln w="19050" cap="flat" cmpd="sng" algn="ctr">
+          <a:solidFill>
+            <a:schemeClr val="phClr"/>
+          </a:solidFill>
+          <a:prstDash val="solid"/>
+          <a:miter lim="800000"/>
+        </a:ln>
+      </a:lnStyleLst>
+      <a:effectStyleLst>
+        <a:effectStyle>
+          <a:effectLst/>
+        </a:effectStyle>
+        <a:effectStyle>
+          <a:effectLst/>
+        </a:effectStyle>
+        <a:effectStyle>
+          <a:effectLst>
+            <a:outerShdw blurRad="57150" dist="19050" dir="5400000" algn="ctr" rotWithShape="0">
+              <a:srgbClr val="000000">
+                <a:alpha val="63000"/>
+              </a:srgbClr>
+            </a:outerShdw>
+          </a:effectLst>
+        </a:effectStyle>
+      </a:effectStyleLst>
+      <a:bgFillStyleLst>
+        <a:solidFill>
+          <a:schemeClr val="phClr"/>
+        </a:solidFill>
+        <a:solidFill>
+          <a:schemeClr val="phClr">
+            <a:tint val="95000"/>
+            <a:satMod val="170000"/>
+          </a:schemeClr>
+        </a:solidFill>
+        <a:gradFill rotWithShape="1">
+          <a:gsLst>
+            <a:gs pos="0">
+              <a:schemeClr val="phClr">
+                <a:tint val="93000"/>
+                <a:satMod val="150000"/>
+                <a:shade val="98000"/>
+                <a:lumMod val="102000"/>
+              </a:schemeClr>
+            </a:gs>
+            <a:gs pos="50000">
+              <a:schemeClr val="phClr">
+                <a:tint val="98000"/>
+                <a:satMod val="130000"/>
+                <a:shade val="90000"/>
+                <a:lumMod val="103000"/>
+              </a:schemeClr>
+            </a:gs>
+            <a:gs pos="100000">
+              <a:schemeClr val="phClr">
+                <a:shade val="63000"/>
+                <a:satMod val="120000"/>
+              </a:schemeClr>
+            </a:gs>
+          </a:gsLst>
+          <a:lin ang="5400000" scaled="0"/>
+        </a:gradFill>
+      </a:bgFillStyleLst>
+    </a:fmtScheme>
+  </a:themeElements>
+  <a:objectDefaults/>
+  <a:extraClrSchemeLst/>
+  <a:extLst>
+    <a:ext uri="{05A4C25C-085E-4340-85A3-A5531E510DB2}">
+      <thm15:themeFamily xmlns:thm15="http://schemas.microsoft.com/office/thememl/2012/main" name="Office Theme" id="{62F939B6-93AF-4DB8-9C6B-D6C7DFDC589F}" vid="{4A3C46E8-61CC-4603-A589-7422A47A8E4A}"/>
+    </a:ext>
+  </a:extLst>
+</a:theme>
+</file>
+
+<file path=ppt/theme/theme3.xml><?xml version="1.0" encoding="utf-8"?>
+<a:theme xmlns:a="http://schemas.openxmlformats.org/drawingml/2006/main" name="Office Theme">
+  <a:themeElements>
+    <a:clrScheme name="Office">
+      <a:dk1>
+        <a:sysClr val="windowText" lastClr="000000"/>
+      </a:dk1>
+      <a:lt1>
+        <a:sysClr val="window" lastClr="FFFFFF"/>
+      </a:lt1>
+      <a:dk2>
+        <a:srgbClr val="44546A"/>
+      </a:dk2>
+      <a:lt2>
+        <a:srgbClr val="E7E6E6"/>
+      </a:lt2>
+      <a:accent1>
+        <a:srgbClr val="4472C4"/>
+      </a:accent1>
+      <a:accent2>
+        <a:srgbClr val="ED7D31"/>
+      </a:accent2>
+      <a:accent3>
+        <a:srgbClr val="A5A5A5"/>
+      </a:accent3>
+      <a:accent4>
+        <a:srgbClr val="FFC000"/>
+      </a:accent4>
+      <a:accent5>
+        <a:srgbClr val="5B9BD5"/>
+      </a:accent5>
+      <a:accent6>
+        <a:srgbClr val="70AD47"/>
+      </a:accent6>
+      <a:hlink>
+        <a:srgbClr val="0563C1"/>
+      </a:hlink>
+      <a:folHlink>
+        <a:srgbClr val="954F72"/>
+      </a:folHlink>
+    </a:clrScheme>
+    <a:fontScheme name="Office">
+      <a:majorFont>
+        <a:latin typeface="Calibri Light" panose="020F0302020204030204"/>
+        <a:ea typeface=""/>
+        <a:cs typeface=""/>
+        <a:font script="Jpan" typeface="游ゴシック Light"/>
+        <a:font script="Hang" typeface="맑은 고딕"/>
+        <a:font script="Hans" typeface="等线 Light"/>
+        <a:font script="Hant" typeface="新細明體"/>
+        <a:font script="Arab" typeface="Times New Roman"/>
+        <a:font script="Hebr" typeface="Times New Roman"/>
+        <a:font script="Thai" typeface="Angsana New"/>
+        <a:font script="Ethi" typeface="Nyala"/>
+        <a:font script="Beng" typeface="Vrinda"/>
+        <a:font script="Gujr" typeface="Shruti"/>
+        <a:font script="Khmr" typeface="MoolBoran"/>
+        <a:font script="Knda" typeface="Tunga"/>
+        <a:font script="Guru" typeface="Raavi"/>
+        <a:font script="Cans" typeface="Euphemia"/>
+        <a:font script="Cher" typeface="Plantagenet Cherokee"/>
+        <a:font script="Yiii" typeface="Microsoft Yi Baiti"/>
+        <a:font script="Tibt" typeface="Microsoft Himalaya"/>
+        <a:font script="Thaa" typeface="MV Boli"/>
+        <a:font script="Deva" typeface="Mangal"/>
+        <a:font script="Telu" typeface="Gautami"/>
+        <a:font script="Taml" typeface="Latha"/>
+        <a:font script="Syrc" typeface="Estrangelo Edessa"/>
+        <a:font script="Orya" typeface="Kalinga"/>
+        <a:font script="Mlym" typeface="Kartika"/>
+        <a:font script="Laoo" typeface="DokChampa"/>
+        <a:font script="Sinh" typeface="Iskoola Pota"/>
+        <a:font script="Mong" typeface="Mongolian Baiti"/>
+        <a:font script="Viet" typeface="Times New Roman"/>
+        <a:font script="Uigh" typeface="Microsoft Uighur"/>
+        <a:font script="Geor" typeface="Sylfaen"/>
+        <a:font script="Armn" typeface="Arial"/>
+        <a:font script="Bugi" typeface="Leelawadee UI"/>
+        <a:font script="Bopo" typeface="Microsoft JhengHei"/>
+        <a:font script="Java" typeface="Javanese Text"/>
+        <a:font script="Lisu" typeface="Segoe UI"/>
+        <a:font script="Mymr" typeface="Myanmar Text"/>
+        <a:font script="Nkoo" typeface="Ebrima"/>
+        <a:font script="Olck" typeface="Nirmala UI"/>
+        <a:font script="Osma" typeface="Ebrima"/>
+        <a:font script="Phag" typeface="Phagspa"/>
+        <a:font script="Syrn" typeface="Estrangelo Edessa"/>
+        <a:font script="Syrj" typeface="Estrangelo Edessa"/>
+        <a:font script="Syre" typeface="Estrangelo Edessa"/>
+        <a:font script="Sora" typeface="Nirmala UI"/>
+        <a:font script="Tale" typeface="Microsoft Tai Le"/>
+        <a:font script="Talu" typeface="Microsoft New Tai Lue"/>
+        <a:font script="Tfng" typeface="Ebrima"/>
+      </a:majorFont>
+      <a:minorFont>
+        <a:latin typeface="Calibri" panose="020F0502020204030204"/>
+        <a:ea typeface=""/>
+        <a:cs typeface=""/>
+        <a:font script="Jpan" typeface="游ゴシック"/>
+        <a:font script="Hang" typeface="맑은 고딕"/>
+        <a:font script="Hans" typeface="等线"/>
+        <a:font script="Hant" typeface="新細明體"/>
+        <a:font script="Arab" typeface="Arial"/>
+        <a:font script="Hebr" typeface="Arial"/>
+        <a:font script="Thai" typeface="Cordia New"/>
+        <a:font script="Ethi" typeface="Nyala"/>
+        <a:font script="Beng" typeface="Vrinda"/>
+        <a:font script="Gujr" typeface="Shruti"/>
+        <a:font script="Khmr" typeface="DaunPenh"/>
+        <a:font script="Knda" typeface="Tunga"/>
+        <a:font script="Guru" typeface="Raavi"/>
+        <a:font script="Cans" typeface="Euphemia"/>
+        <a:font script="Cher" typeface="Plantagenet Cherokee"/>
+        <a:font script="Yiii" typeface="Microsoft Yi Baiti"/>
+        <a:font script="Tibt" typeface="Microsoft Himalaya"/>
+        <a:font script="Thaa" typeface="MV Boli"/>
+        <a:font script="Deva" typeface="Mangal"/>
+        <a:font script="Telu" typeface="Gautami"/>
+        <a:font script="Taml" typeface="Latha"/>
+        <a:font script="Syrc" typeface="Estrangelo Edessa"/>
+        <a:font script="Orya" typeface="Kalinga"/>
+        <a:font script="Mlym" typeface="Kartika"/>
+        <a:font script="Laoo" typeface="DokChampa"/>
+        <a:font script="Sinh" typeface="Iskoola Pota"/>
+        <a:font script="Mong" typeface="Mongolian Baiti"/>
+        <a:font script="Viet" typeface="Arial"/>
+        <a:font script="Uigh" typeface="Microsoft Uighur"/>
+        <a:font script="Geor" typeface="Sylfaen"/>
+        <a:font script="Armn" typeface="Arial"/>
+        <a:font script="Bugi" typeface="Leelawadee UI"/>
+        <a:font script="Bopo" typeface="Microsoft JhengHei"/>
+        <a:font script="Java" typeface="Javanese Text"/>
+        <a:font script="Lisu" typeface="Segoe UI"/>
+        <a:font script="Mymr" typeface="Myanmar Text"/>
+        <a:font script="Nkoo" typeface="Ebrima"/>
+        <a:font script="Olck" typeface="Nirmala UI"/>
+        <a:font script="Osma" typeface="Ebrima"/>
+        <a:font script="Phag" typeface="Phagspa"/>
+        <a:font script="Syrn" typeface="Estrangelo Edessa"/>
+        <a:font script="Syrj" typeface="Estrangelo Edessa"/>
+        <a:font script="Syre" typeface="Estrangelo Edessa"/>
+        <a:font script="Sora" typeface="Nirmala UI"/>
+        <a:font script="Tale" typeface="Microsoft Tai Le"/>
+        <a:font script="Talu" typeface="Microsoft New Tai Lue"/>
+        <a:font script="Tfng" typeface="Ebrima"/>
       </a:minorFont>
     </a:fontScheme>
     <a:fmtScheme name="Office">
